--- a/Boldr_AlphaBeta_Submission.pptx
+++ b/Boldr_AlphaBeta_Submission.pptx
@@ -16,8 +16,9 @@
     <p:sldId id="264" r:id="rId10"/>
     <p:sldId id="265" r:id="rId11"/>
     <p:sldId id="266" r:id="rId12"/>
-    <p:sldId id="271" r:id="rId13"/>
-    <p:sldId id="269" r:id="rId14"/>
+    <p:sldId id="272" r:id="rId13"/>
+    <p:sldId id="271" r:id="rId14"/>
+    <p:sldId id="269" r:id="rId15"/>
   </p:sldIdLst>
   <p:sldSz cx="12192000" cy="6858000"/>
   <p:notesSz cx="6858000" cy="9144000"/>
@@ -5500,7 +5501,7 @@
         <p:spPr>
           <a:xfrm>
             <a:off x="548640" y="566928"/>
-            <a:ext cx="10972800" cy="640080"/>
+            <a:ext cx="10972800" cy="541495"/>
           </a:xfrm>
           <a:prstGeom prst="rect">
             <a:avLst/>
@@ -5519,13 +5520,22 @@
               </a:lnSpc>
             </a:pPr>
             <a:r>
-              <a:rPr sz="3000" b="1" i="0">
+              <a:rPr lang="en-US" sz="3000" b="1" i="0" dirty="0">
                 <a:solidFill>
                   <a:srgbClr val="0B1437"/>
                 </a:solidFill>
                 <a:latin typeface="Georgia"/>
               </a:rPr>
-              <a:t>Live in n8n, public repo, validated on real tickets</a:t>
+              <a:t>Architecture: </a:t>
+            </a:r>
+            <a:r>
+              <a:rPr sz="3000" b="1" i="0" dirty="0">
+                <a:solidFill>
+                  <a:srgbClr val="0B1437"/>
+                </a:solidFill>
+                <a:latin typeface="Georgia"/>
+              </a:rPr>
+              <a:t>Live in n8n, public repo</a:t>
             </a:r>
           </a:p>
         </p:txBody>
@@ -5577,1141 +5587,6 @@
       </p:sp>
       <p:sp>
         <p:nvSpPr>
-          <p:cNvPr id="5" name="Rounded Rectangle 4"/>
-          <p:cNvSpPr/>
-          <p:nvPr/>
-        </p:nvSpPr>
-        <p:spPr>
-          <a:xfrm>
-            <a:off x="548640" y="1417320"/>
-            <a:ext cx="5486400" cy="4846320"/>
-          </a:xfrm>
-          <a:prstGeom prst="roundRect">
-            <a:avLst>
-              <a:gd name="adj" fmla="val 4000"/>
-            </a:avLst>
-          </a:prstGeom>
-          <a:solidFill>
-            <a:srgbClr val="FFFFFF"/>
-          </a:solidFill>
-          <a:ln w="9525">
-            <a:solidFill>
-              <a:srgbClr val="D3D8E6"/>
-            </a:solidFill>
-          </a:ln>
-          <a:effectLst/>
-        </p:spPr>
-        <p:style>
-          <a:lnRef idx="1">
-            <a:schemeClr val="accent1"/>
-          </a:lnRef>
-          <a:fillRef idx="3">
-            <a:schemeClr val="accent1"/>
-          </a:fillRef>
-          <a:effectRef idx="2">
-            <a:schemeClr val="accent1"/>
-          </a:effectRef>
-          <a:fontRef idx="minor">
-            <a:schemeClr val="lt1"/>
-          </a:fontRef>
-        </p:style>
-        <p:txBody>
-          <a:bodyPr rtlCol="0" anchor="ctr"/>
-          <a:lstStyle/>
-          <a:p>
-            <a:pPr algn="ctr"/>
-            <a:endParaRPr/>
-          </a:p>
-        </p:txBody>
-      </p:sp>
-      <p:sp>
-        <p:nvSpPr>
-          <p:cNvPr id="6" name="TextBox 5"/>
-          <p:cNvSpPr txBox="1"/>
-          <p:nvPr/>
-        </p:nvSpPr>
-        <p:spPr>
-          <a:xfrm>
-            <a:off x="777240" y="1600200"/>
-            <a:ext cx="5029200" cy="365760"/>
-          </a:xfrm>
-          <a:prstGeom prst="rect">
-            <a:avLst/>
-          </a:prstGeom>
-          <a:noFill/>
-        </p:spPr>
-        <p:txBody>
-          <a:bodyPr wrap="square" lIns="27432" tIns="18288" rIns="27432" bIns="18288" anchor="t">
-            <a:spAutoFit/>
-          </a:bodyPr>
-          <a:lstStyle/>
-          <a:p>
-            <a:pPr algn="l">
-              <a:lnSpc>
-                <a:spcPct val="120000"/>
-              </a:lnSpc>
-            </a:pPr>
-            <a:r>
-              <a:rPr sz="1100" b="1" i="0">
-                <a:solidFill>
-                  <a:srgbClr val="C9A961"/>
-                </a:solidFill>
-                <a:latin typeface="Calibri"/>
-              </a:rPr>
-              <a:t>BUILD STATUS  ·  n8n @ tejasdotchavan.app.n8n.cloud</a:t>
-            </a:r>
-          </a:p>
-        </p:txBody>
-      </p:sp>
-      <p:sp>
-        <p:nvSpPr>
-          <p:cNvPr id="7" name="TextBox 6"/>
-          <p:cNvSpPr txBox="1"/>
-          <p:nvPr/>
-        </p:nvSpPr>
-        <p:spPr>
-          <a:xfrm>
-            <a:off x="777240" y="2011680"/>
-            <a:ext cx="3657600" cy="365760"/>
-          </a:xfrm>
-          <a:prstGeom prst="rect">
-            <a:avLst/>
-          </a:prstGeom>
-          <a:noFill/>
-        </p:spPr>
-        <p:txBody>
-          <a:bodyPr wrap="square" lIns="27432" tIns="18288" rIns="27432" bIns="18288" anchor="ctr">
-            <a:spAutoFit/>
-          </a:bodyPr>
-          <a:lstStyle/>
-          <a:p>
-            <a:pPr algn="l">
-              <a:lnSpc>
-                <a:spcPct val="120000"/>
-              </a:lnSpc>
-            </a:pPr>
-            <a:r>
-              <a:rPr sz="1200" b="0" i="0">
-                <a:solidFill>
-                  <a:srgbClr val="14182C"/>
-                </a:solidFill>
-                <a:latin typeface="Calibri"/>
-              </a:rPr>
-              <a:t>Webhook trigger</a:t>
-            </a:r>
-          </a:p>
-        </p:txBody>
-      </p:sp>
-      <p:sp>
-        <p:nvSpPr>
-          <p:cNvPr id="8" name="Rounded Rectangle 7"/>
-          <p:cNvSpPr/>
-          <p:nvPr/>
-        </p:nvSpPr>
-        <p:spPr>
-          <a:xfrm>
-            <a:off x="4572000" y="2057400"/>
-            <a:ext cx="1280160" cy="292608"/>
-          </a:xfrm>
-          <a:prstGeom prst="roundRect">
-            <a:avLst>
-              <a:gd name="adj" fmla="val 40000"/>
-            </a:avLst>
-          </a:prstGeom>
-          <a:solidFill>
-            <a:srgbClr val="2C8A5D"/>
-          </a:solidFill>
-          <a:ln>
-            <a:noFill/>
-          </a:ln>
-          <a:effectLst/>
-        </p:spPr>
-        <p:style>
-          <a:lnRef idx="1">
-            <a:schemeClr val="accent1"/>
-          </a:lnRef>
-          <a:fillRef idx="3">
-            <a:schemeClr val="accent1"/>
-          </a:fillRef>
-          <a:effectRef idx="2">
-            <a:schemeClr val="accent1"/>
-          </a:effectRef>
-          <a:fontRef idx="minor">
-            <a:schemeClr val="lt1"/>
-          </a:fontRef>
-        </p:style>
-        <p:txBody>
-          <a:bodyPr rtlCol="0" anchor="ctr"/>
-          <a:lstStyle/>
-          <a:p>
-            <a:pPr algn="ctr"/>
-            <a:endParaRPr/>
-          </a:p>
-        </p:txBody>
-      </p:sp>
-      <p:sp>
-        <p:nvSpPr>
-          <p:cNvPr id="9" name="TextBox 8"/>
-          <p:cNvSpPr txBox="1"/>
-          <p:nvPr/>
-        </p:nvSpPr>
-        <p:spPr>
-          <a:xfrm>
-            <a:off x="4572000" y="2057400"/>
-            <a:ext cx="1280160" cy="292608"/>
-          </a:xfrm>
-          <a:prstGeom prst="rect">
-            <a:avLst/>
-          </a:prstGeom>
-          <a:noFill/>
-        </p:spPr>
-        <p:txBody>
-          <a:bodyPr wrap="square" lIns="27432" tIns="18288" rIns="27432" bIns="18288" anchor="ctr">
-            <a:spAutoFit/>
-          </a:bodyPr>
-          <a:lstStyle/>
-          <a:p>
-            <a:pPr algn="ctr">
-              <a:lnSpc>
-                <a:spcPct val="120000"/>
-              </a:lnSpc>
-            </a:pPr>
-            <a:r>
-              <a:rPr sz="1000" b="1" i="0">
-                <a:solidFill>
-                  <a:srgbClr val="FFFFFF"/>
-                </a:solidFill>
-                <a:latin typeface="Calibri"/>
-              </a:rPr>
-              <a:t>LIVE</a:t>
-            </a:r>
-          </a:p>
-        </p:txBody>
-      </p:sp>
-      <p:sp>
-        <p:nvSpPr>
-          <p:cNvPr id="10" name="TextBox 9"/>
-          <p:cNvSpPr txBox="1"/>
-          <p:nvPr/>
-        </p:nvSpPr>
-        <p:spPr>
-          <a:xfrm>
-            <a:off x="777240" y="2450592"/>
-            <a:ext cx="3657600" cy="365760"/>
-          </a:xfrm>
-          <a:prstGeom prst="rect">
-            <a:avLst/>
-          </a:prstGeom>
-          <a:noFill/>
-        </p:spPr>
-        <p:txBody>
-          <a:bodyPr wrap="square" lIns="27432" tIns="18288" rIns="27432" bIns="18288" anchor="ctr">
-            <a:spAutoFit/>
-          </a:bodyPr>
-          <a:lstStyle/>
-          <a:p>
-            <a:pPr algn="l">
-              <a:lnSpc>
-                <a:spcPct val="120000"/>
-              </a:lnSpc>
-            </a:pPr>
-            <a:r>
-              <a:rPr sz="1200" b="0" i="0">
-                <a:solidFill>
-                  <a:srgbClr val="14182C"/>
-                </a:solidFill>
-                <a:latin typeface="Calibri"/>
-              </a:rPr>
-              <a:t>Step 1 — Ingest &amp; Classify</a:t>
-            </a:r>
-          </a:p>
-        </p:txBody>
-      </p:sp>
-      <p:sp>
-        <p:nvSpPr>
-          <p:cNvPr id="11" name="Rounded Rectangle 10"/>
-          <p:cNvSpPr/>
-          <p:nvPr/>
-        </p:nvSpPr>
-        <p:spPr>
-          <a:xfrm>
-            <a:off x="4572000" y="2496312"/>
-            <a:ext cx="1280160" cy="292608"/>
-          </a:xfrm>
-          <a:prstGeom prst="roundRect">
-            <a:avLst>
-              <a:gd name="adj" fmla="val 40000"/>
-            </a:avLst>
-          </a:prstGeom>
-          <a:solidFill>
-            <a:srgbClr val="2C8A5D"/>
-          </a:solidFill>
-          <a:ln>
-            <a:noFill/>
-          </a:ln>
-          <a:effectLst/>
-        </p:spPr>
-        <p:style>
-          <a:lnRef idx="1">
-            <a:schemeClr val="accent1"/>
-          </a:lnRef>
-          <a:fillRef idx="3">
-            <a:schemeClr val="accent1"/>
-          </a:fillRef>
-          <a:effectRef idx="2">
-            <a:schemeClr val="accent1"/>
-          </a:effectRef>
-          <a:fontRef idx="minor">
-            <a:schemeClr val="lt1"/>
-          </a:fontRef>
-        </p:style>
-        <p:txBody>
-          <a:bodyPr rtlCol="0" anchor="ctr"/>
-          <a:lstStyle/>
-          <a:p>
-            <a:pPr algn="ctr"/>
-            <a:endParaRPr/>
-          </a:p>
-        </p:txBody>
-      </p:sp>
-      <p:sp>
-        <p:nvSpPr>
-          <p:cNvPr id="12" name="TextBox 11"/>
-          <p:cNvSpPr txBox="1"/>
-          <p:nvPr/>
-        </p:nvSpPr>
-        <p:spPr>
-          <a:xfrm>
-            <a:off x="4572000" y="2496312"/>
-            <a:ext cx="1280160" cy="292608"/>
-          </a:xfrm>
-          <a:prstGeom prst="rect">
-            <a:avLst/>
-          </a:prstGeom>
-          <a:noFill/>
-        </p:spPr>
-        <p:txBody>
-          <a:bodyPr wrap="square" lIns="27432" tIns="18288" rIns="27432" bIns="18288" anchor="ctr">
-            <a:spAutoFit/>
-          </a:bodyPr>
-          <a:lstStyle/>
-          <a:p>
-            <a:pPr algn="ctr">
-              <a:lnSpc>
-                <a:spcPct val="120000"/>
-              </a:lnSpc>
-            </a:pPr>
-            <a:r>
-              <a:rPr sz="1000" b="1" i="0">
-                <a:solidFill>
-                  <a:srgbClr val="FFFFFF"/>
-                </a:solidFill>
-                <a:latin typeface="Calibri"/>
-              </a:rPr>
-              <a:t>LIVE</a:t>
-            </a:r>
-          </a:p>
-        </p:txBody>
-      </p:sp>
-      <p:sp>
-        <p:nvSpPr>
-          <p:cNvPr id="13" name="TextBox 12"/>
-          <p:cNvSpPr txBox="1"/>
-          <p:nvPr/>
-        </p:nvSpPr>
-        <p:spPr>
-          <a:xfrm>
-            <a:off x="777240" y="2889504"/>
-            <a:ext cx="3657600" cy="365760"/>
-          </a:xfrm>
-          <a:prstGeom prst="rect">
-            <a:avLst/>
-          </a:prstGeom>
-          <a:noFill/>
-        </p:spPr>
-        <p:txBody>
-          <a:bodyPr wrap="square" lIns="27432" tIns="18288" rIns="27432" bIns="18288" anchor="ctr">
-            <a:spAutoFit/>
-          </a:bodyPr>
-          <a:lstStyle/>
-          <a:p>
-            <a:pPr algn="l">
-              <a:lnSpc>
-                <a:spcPct val="120000"/>
-              </a:lnSpc>
-            </a:pPr>
-            <a:r>
-              <a:rPr sz="1200" b="0" i="0">
-                <a:solidFill>
-                  <a:srgbClr val="14182C"/>
-                </a:solidFill>
-                <a:latin typeface="Calibri"/>
-              </a:rPr>
-              <a:t>Step 1b — Persona tagger</a:t>
-            </a:r>
-          </a:p>
-        </p:txBody>
-      </p:sp>
-      <p:sp>
-        <p:nvSpPr>
-          <p:cNvPr id="14" name="Rounded Rectangle 13"/>
-          <p:cNvSpPr/>
-          <p:nvPr/>
-        </p:nvSpPr>
-        <p:spPr>
-          <a:xfrm>
-            <a:off x="4572000" y="2935224"/>
-            <a:ext cx="1280160" cy="292608"/>
-          </a:xfrm>
-          <a:prstGeom prst="roundRect">
-            <a:avLst>
-              <a:gd name="adj" fmla="val 40000"/>
-            </a:avLst>
-          </a:prstGeom>
-          <a:solidFill>
-            <a:srgbClr val="2C8A5D"/>
-          </a:solidFill>
-          <a:ln>
-            <a:noFill/>
-          </a:ln>
-          <a:effectLst/>
-        </p:spPr>
-        <p:style>
-          <a:lnRef idx="1">
-            <a:schemeClr val="accent1"/>
-          </a:lnRef>
-          <a:fillRef idx="3">
-            <a:schemeClr val="accent1"/>
-          </a:fillRef>
-          <a:effectRef idx="2">
-            <a:schemeClr val="accent1"/>
-          </a:effectRef>
-          <a:fontRef idx="minor">
-            <a:schemeClr val="lt1"/>
-          </a:fontRef>
-        </p:style>
-        <p:txBody>
-          <a:bodyPr rtlCol="0" anchor="ctr"/>
-          <a:lstStyle/>
-          <a:p>
-            <a:pPr algn="ctr"/>
-            <a:endParaRPr/>
-          </a:p>
-        </p:txBody>
-      </p:sp>
-      <p:sp>
-        <p:nvSpPr>
-          <p:cNvPr id="15" name="TextBox 14"/>
-          <p:cNvSpPr txBox="1"/>
-          <p:nvPr/>
-        </p:nvSpPr>
-        <p:spPr>
-          <a:xfrm>
-            <a:off x="4572000" y="2935224"/>
-            <a:ext cx="1280160" cy="292608"/>
-          </a:xfrm>
-          <a:prstGeom prst="rect">
-            <a:avLst/>
-          </a:prstGeom>
-          <a:noFill/>
-        </p:spPr>
-        <p:txBody>
-          <a:bodyPr wrap="square" lIns="27432" tIns="18288" rIns="27432" bIns="18288" anchor="ctr">
-            <a:spAutoFit/>
-          </a:bodyPr>
-          <a:lstStyle/>
-          <a:p>
-            <a:pPr algn="ctr">
-              <a:lnSpc>
-                <a:spcPct val="120000"/>
-              </a:lnSpc>
-            </a:pPr>
-            <a:r>
-              <a:rPr sz="1000" b="1" i="0">
-                <a:solidFill>
-                  <a:srgbClr val="FFFFFF"/>
-                </a:solidFill>
-                <a:latin typeface="Calibri"/>
-              </a:rPr>
-              <a:t>LIVE</a:t>
-            </a:r>
-          </a:p>
-        </p:txBody>
-      </p:sp>
-      <p:sp>
-        <p:nvSpPr>
-          <p:cNvPr id="16" name="TextBox 15"/>
-          <p:cNvSpPr txBox="1"/>
-          <p:nvPr/>
-        </p:nvSpPr>
-        <p:spPr>
-          <a:xfrm>
-            <a:off x="777240" y="3328416"/>
-            <a:ext cx="3657600" cy="365760"/>
-          </a:xfrm>
-          <a:prstGeom prst="rect">
-            <a:avLst/>
-          </a:prstGeom>
-          <a:noFill/>
-        </p:spPr>
-        <p:txBody>
-          <a:bodyPr wrap="square" lIns="27432" tIns="18288" rIns="27432" bIns="18288" anchor="ctr">
-            <a:spAutoFit/>
-          </a:bodyPr>
-          <a:lstStyle/>
-          <a:p>
-            <a:pPr algn="l">
-              <a:lnSpc>
-                <a:spcPct val="120000"/>
-              </a:lnSpc>
-            </a:pPr>
-            <a:r>
-              <a:rPr sz="1200" b="0" i="0">
-                <a:solidFill>
-                  <a:srgbClr val="14182C"/>
-                </a:solidFill>
-                <a:latin typeface="Calibri"/>
-              </a:rPr>
-              <a:t>Step 2 — KB Search routing</a:t>
-            </a:r>
-          </a:p>
-        </p:txBody>
-      </p:sp>
-      <p:sp>
-        <p:nvSpPr>
-          <p:cNvPr id="17" name="Rounded Rectangle 16"/>
-          <p:cNvSpPr/>
-          <p:nvPr/>
-        </p:nvSpPr>
-        <p:spPr>
-          <a:xfrm>
-            <a:off x="4572000" y="3374136"/>
-            <a:ext cx="1280160" cy="292608"/>
-          </a:xfrm>
-          <a:prstGeom prst="roundRect">
-            <a:avLst>
-              <a:gd name="adj" fmla="val 40000"/>
-            </a:avLst>
-          </a:prstGeom>
-          <a:solidFill>
-            <a:srgbClr val="2C8A5D"/>
-          </a:solidFill>
-          <a:ln>
-            <a:noFill/>
-          </a:ln>
-          <a:effectLst/>
-        </p:spPr>
-        <p:style>
-          <a:lnRef idx="1">
-            <a:schemeClr val="accent1"/>
-          </a:lnRef>
-          <a:fillRef idx="3">
-            <a:schemeClr val="accent1"/>
-          </a:fillRef>
-          <a:effectRef idx="2">
-            <a:schemeClr val="accent1"/>
-          </a:effectRef>
-          <a:fontRef idx="minor">
-            <a:schemeClr val="lt1"/>
-          </a:fontRef>
-        </p:style>
-        <p:txBody>
-          <a:bodyPr rtlCol="0" anchor="ctr"/>
-          <a:lstStyle/>
-          <a:p>
-            <a:pPr algn="ctr"/>
-            <a:endParaRPr/>
-          </a:p>
-        </p:txBody>
-      </p:sp>
-      <p:sp>
-        <p:nvSpPr>
-          <p:cNvPr id="18" name="TextBox 17"/>
-          <p:cNvSpPr txBox="1"/>
-          <p:nvPr/>
-        </p:nvSpPr>
-        <p:spPr>
-          <a:xfrm>
-            <a:off x="4572000" y="3374136"/>
-            <a:ext cx="1280160" cy="292608"/>
-          </a:xfrm>
-          <a:prstGeom prst="rect">
-            <a:avLst/>
-          </a:prstGeom>
-          <a:noFill/>
-        </p:spPr>
-        <p:txBody>
-          <a:bodyPr wrap="square" lIns="27432" tIns="18288" rIns="27432" bIns="18288" anchor="ctr">
-            <a:spAutoFit/>
-          </a:bodyPr>
-          <a:lstStyle/>
-          <a:p>
-            <a:pPr algn="ctr">
-              <a:lnSpc>
-                <a:spcPct val="120000"/>
-              </a:lnSpc>
-            </a:pPr>
-            <a:r>
-              <a:rPr sz="1000" b="1" i="0">
-                <a:solidFill>
-                  <a:srgbClr val="FFFFFF"/>
-                </a:solidFill>
-                <a:latin typeface="Calibri"/>
-              </a:rPr>
-              <a:t>LIVE</a:t>
-            </a:r>
-          </a:p>
-        </p:txBody>
-      </p:sp>
-      <p:sp>
-        <p:nvSpPr>
-          <p:cNvPr id="19" name="TextBox 18"/>
-          <p:cNvSpPr txBox="1"/>
-          <p:nvPr/>
-        </p:nvSpPr>
-        <p:spPr>
-          <a:xfrm>
-            <a:off x="777240" y="3767328"/>
-            <a:ext cx="3657600" cy="365760"/>
-          </a:xfrm>
-          <a:prstGeom prst="rect">
-            <a:avLst/>
-          </a:prstGeom>
-          <a:noFill/>
-        </p:spPr>
-        <p:txBody>
-          <a:bodyPr wrap="square" lIns="27432" tIns="18288" rIns="27432" bIns="18288" anchor="ctr">
-            <a:spAutoFit/>
-          </a:bodyPr>
-          <a:lstStyle/>
-          <a:p>
-            <a:pPr algn="l">
-              <a:lnSpc>
-                <a:spcPct val="120000"/>
-              </a:lnSpc>
-            </a:pPr>
-            <a:r>
-              <a:rPr sz="1200" b="0" i="0">
-                <a:solidFill>
-                  <a:srgbClr val="14182C"/>
-                </a:solidFill>
-                <a:latin typeface="Calibri"/>
-              </a:rPr>
-              <a:t>Step 3 — Draft reply (brand voice)</a:t>
-            </a:r>
-          </a:p>
-        </p:txBody>
-      </p:sp>
-      <p:sp>
-        <p:nvSpPr>
-          <p:cNvPr id="20" name="Rounded Rectangle 19"/>
-          <p:cNvSpPr/>
-          <p:nvPr/>
-        </p:nvSpPr>
-        <p:spPr>
-          <a:xfrm>
-            <a:off x="4572000" y="3813048"/>
-            <a:ext cx="1280160" cy="292608"/>
-          </a:xfrm>
-          <a:prstGeom prst="roundRect">
-            <a:avLst>
-              <a:gd name="adj" fmla="val 40000"/>
-            </a:avLst>
-          </a:prstGeom>
-          <a:solidFill>
-            <a:srgbClr val="2C8A5D"/>
-          </a:solidFill>
-          <a:ln>
-            <a:noFill/>
-          </a:ln>
-          <a:effectLst/>
-        </p:spPr>
-        <p:style>
-          <a:lnRef idx="1">
-            <a:schemeClr val="accent1"/>
-          </a:lnRef>
-          <a:fillRef idx="3">
-            <a:schemeClr val="accent1"/>
-          </a:fillRef>
-          <a:effectRef idx="2">
-            <a:schemeClr val="accent1"/>
-          </a:effectRef>
-          <a:fontRef idx="minor">
-            <a:schemeClr val="lt1"/>
-          </a:fontRef>
-        </p:style>
-        <p:txBody>
-          <a:bodyPr rtlCol="0" anchor="ctr"/>
-          <a:lstStyle/>
-          <a:p>
-            <a:pPr algn="ctr"/>
-            <a:endParaRPr/>
-          </a:p>
-        </p:txBody>
-      </p:sp>
-      <p:sp>
-        <p:nvSpPr>
-          <p:cNvPr id="21" name="TextBox 20"/>
-          <p:cNvSpPr txBox="1"/>
-          <p:nvPr/>
-        </p:nvSpPr>
-        <p:spPr>
-          <a:xfrm>
-            <a:off x="4572000" y="3813048"/>
-            <a:ext cx="1280160" cy="292608"/>
-          </a:xfrm>
-          <a:prstGeom prst="rect">
-            <a:avLst/>
-          </a:prstGeom>
-          <a:noFill/>
-        </p:spPr>
-        <p:txBody>
-          <a:bodyPr wrap="square" lIns="27432" tIns="18288" rIns="27432" bIns="18288" anchor="ctr">
-            <a:spAutoFit/>
-          </a:bodyPr>
-          <a:lstStyle/>
-          <a:p>
-            <a:pPr algn="ctr">
-              <a:lnSpc>
-                <a:spcPct val="120000"/>
-              </a:lnSpc>
-            </a:pPr>
-            <a:r>
-              <a:rPr sz="1000" b="1" i="0">
-                <a:solidFill>
-                  <a:srgbClr val="FFFFFF"/>
-                </a:solidFill>
-                <a:latin typeface="Calibri"/>
-              </a:rPr>
-              <a:t>LIVE</a:t>
-            </a:r>
-          </a:p>
-        </p:txBody>
-      </p:sp>
-      <p:sp>
-        <p:nvSpPr>
-          <p:cNvPr id="22" name="TextBox 21"/>
-          <p:cNvSpPr txBox="1"/>
-          <p:nvPr/>
-        </p:nvSpPr>
-        <p:spPr>
-          <a:xfrm>
-            <a:off x="777240" y="4206240"/>
-            <a:ext cx="3657600" cy="365760"/>
-          </a:xfrm>
-          <a:prstGeom prst="rect">
-            <a:avLst/>
-          </a:prstGeom>
-          <a:noFill/>
-        </p:spPr>
-        <p:txBody>
-          <a:bodyPr wrap="square" lIns="27432" tIns="18288" rIns="27432" bIns="18288" anchor="ctr">
-            <a:spAutoFit/>
-          </a:bodyPr>
-          <a:lstStyle/>
-          <a:p>
-            <a:pPr algn="l">
-              <a:lnSpc>
-                <a:spcPct val="120000"/>
-              </a:lnSpc>
-            </a:pPr>
-            <a:r>
-              <a:rPr sz="1200" b="0" i="0">
-                <a:solidFill>
-                  <a:srgbClr val="14182C"/>
-                </a:solidFill>
-                <a:latin typeface="Calibri"/>
-              </a:rPr>
-              <a:t>Step 4 — Flag knowledge gap</a:t>
-            </a:r>
-          </a:p>
-        </p:txBody>
-      </p:sp>
-      <p:sp>
-        <p:nvSpPr>
-          <p:cNvPr id="23" name="Rounded Rectangle 22"/>
-          <p:cNvSpPr/>
-          <p:nvPr/>
-        </p:nvSpPr>
-        <p:spPr>
-          <a:xfrm>
-            <a:off x="4572000" y="4251959"/>
-            <a:ext cx="1280160" cy="292608"/>
-          </a:xfrm>
-          <a:prstGeom prst="roundRect">
-            <a:avLst>
-              <a:gd name="adj" fmla="val 40000"/>
-            </a:avLst>
-          </a:prstGeom>
-          <a:solidFill>
-            <a:srgbClr val="2C8A5D"/>
-          </a:solidFill>
-          <a:ln>
-            <a:noFill/>
-          </a:ln>
-          <a:effectLst/>
-        </p:spPr>
-        <p:style>
-          <a:lnRef idx="1">
-            <a:schemeClr val="accent1"/>
-          </a:lnRef>
-          <a:fillRef idx="3">
-            <a:schemeClr val="accent1"/>
-          </a:fillRef>
-          <a:effectRef idx="2">
-            <a:schemeClr val="accent1"/>
-          </a:effectRef>
-          <a:fontRef idx="minor">
-            <a:schemeClr val="lt1"/>
-          </a:fontRef>
-        </p:style>
-        <p:txBody>
-          <a:bodyPr rtlCol="0" anchor="ctr"/>
-          <a:lstStyle/>
-          <a:p>
-            <a:pPr algn="ctr"/>
-            <a:endParaRPr/>
-          </a:p>
-        </p:txBody>
-      </p:sp>
-      <p:sp>
-        <p:nvSpPr>
-          <p:cNvPr id="24" name="TextBox 23"/>
-          <p:cNvSpPr txBox="1"/>
-          <p:nvPr/>
-        </p:nvSpPr>
-        <p:spPr>
-          <a:xfrm>
-            <a:off x="4572000" y="4293619"/>
-            <a:ext cx="1280160" cy="209288"/>
-          </a:xfrm>
-          <a:prstGeom prst="rect">
-            <a:avLst/>
-          </a:prstGeom>
-          <a:noFill/>
-        </p:spPr>
-        <p:txBody>
-          <a:bodyPr wrap="square" lIns="27432" tIns="18288" rIns="27432" bIns="18288" anchor="ctr">
-            <a:spAutoFit/>
-          </a:bodyPr>
-          <a:lstStyle/>
-          <a:p>
-            <a:pPr algn="ctr">
-              <a:lnSpc>
-                <a:spcPct val="120000"/>
-              </a:lnSpc>
-            </a:pPr>
-            <a:r>
-              <a:rPr sz="1000" b="1" i="0">
-                <a:solidFill>
-                  <a:srgbClr val="FFFFFF"/>
-                </a:solidFill>
-                <a:latin typeface="Calibri"/>
-              </a:rPr>
-              <a:t>LIVE</a:t>
-            </a:r>
-          </a:p>
-        </p:txBody>
-      </p:sp>
-      <p:sp>
-        <p:nvSpPr>
-          <p:cNvPr id="25" name="TextBox 24"/>
-          <p:cNvSpPr txBox="1"/>
-          <p:nvPr/>
-        </p:nvSpPr>
-        <p:spPr>
-          <a:xfrm>
-            <a:off x="777240" y="4645152"/>
-            <a:ext cx="3657600" cy="365760"/>
-          </a:xfrm>
-          <a:prstGeom prst="rect">
-            <a:avLst/>
-          </a:prstGeom>
-          <a:noFill/>
-        </p:spPr>
-        <p:txBody>
-          <a:bodyPr wrap="square" lIns="27432" tIns="18288" rIns="27432" bIns="18288" anchor="ctr">
-            <a:spAutoFit/>
-          </a:bodyPr>
-          <a:lstStyle/>
-          <a:p>
-            <a:pPr algn="l">
-              <a:lnSpc>
-                <a:spcPct val="120000"/>
-              </a:lnSpc>
-            </a:pPr>
-            <a:r>
-              <a:rPr sz="1200" b="0" i="0">
-                <a:solidFill>
-                  <a:srgbClr val="14182C"/>
-                </a:solidFill>
-                <a:latin typeface="Calibri"/>
-              </a:rPr>
-              <a:t>Step 5 — Auto-draft KB entry</a:t>
-            </a:r>
-          </a:p>
-        </p:txBody>
-      </p:sp>
-      <p:sp>
-        <p:nvSpPr>
-          <p:cNvPr id="26" name="Rounded Rectangle 25"/>
-          <p:cNvSpPr/>
-          <p:nvPr/>
-        </p:nvSpPr>
-        <p:spPr>
-          <a:xfrm>
-            <a:off x="4572000" y="4690872"/>
-            <a:ext cx="1280160" cy="292608"/>
-          </a:xfrm>
-          <a:prstGeom prst="roundRect">
-            <a:avLst>
-              <a:gd name="adj" fmla="val 40000"/>
-            </a:avLst>
-          </a:prstGeom>
-          <a:solidFill>
-            <a:srgbClr val="C9A961"/>
-          </a:solidFill>
-          <a:ln>
-            <a:noFill/>
-          </a:ln>
-          <a:effectLst/>
-        </p:spPr>
-        <p:style>
-          <a:lnRef idx="1">
-            <a:schemeClr val="accent1"/>
-          </a:lnRef>
-          <a:fillRef idx="3">
-            <a:schemeClr val="accent1"/>
-          </a:fillRef>
-          <a:effectRef idx="2">
-            <a:schemeClr val="accent1"/>
-          </a:effectRef>
-          <a:fontRef idx="minor">
-            <a:schemeClr val="lt1"/>
-          </a:fontRef>
-        </p:style>
-        <p:txBody>
-          <a:bodyPr rtlCol="0" anchor="ctr"/>
-          <a:lstStyle/>
-          <a:p>
-            <a:pPr algn="ctr"/>
-            <a:endParaRPr/>
-          </a:p>
-        </p:txBody>
-      </p:sp>
-      <p:sp>
-        <p:nvSpPr>
-          <p:cNvPr id="28" name="TextBox 27"/>
-          <p:cNvSpPr txBox="1"/>
-          <p:nvPr/>
-        </p:nvSpPr>
-        <p:spPr>
-          <a:xfrm>
-            <a:off x="777240" y="5084064"/>
-            <a:ext cx="3657600" cy="365760"/>
-          </a:xfrm>
-          <a:prstGeom prst="rect">
-            <a:avLst/>
-          </a:prstGeom>
-          <a:noFill/>
-        </p:spPr>
-        <p:txBody>
-          <a:bodyPr wrap="square" lIns="27432" tIns="18288" rIns="27432" bIns="18288" anchor="ctr">
-            <a:spAutoFit/>
-          </a:bodyPr>
-          <a:lstStyle/>
-          <a:p>
-            <a:pPr algn="l">
-              <a:lnSpc>
-                <a:spcPct val="120000"/>
-              </a:lnSpc>
-            </a:pPr>
-            <a:r>
-              <a:rPr sz="1200" b="0" i="0">
-                <a:solidFill>
-                  <a:srgbClr val="14182C"/>
-                </a:solidFill>
-                <a:latin typeface="Calibri"/>
-              </a:rPr>
-              <a:t>Step 6 — Weekly clustering</a:t>
-            </a:r>
-          </a:p>
-        </p:txBody>
-      </p:sp>
-      <p:sp>
-        <p:nvSpPr>
-          <p:cNvPr id="29" name="Rounded Rectangle 28"/>
-          <p:cNvSpPr/>
-          <p:nvPr/>
-        </p:nvSpPr>
-        <p:spPr>
-          <a:xfrm>
-            <a:off x="4572000" y="5129784"/>
-            <a:ext cx="1280160" cy="292608"/>
-          </a:xfrm>
-          <a:prstGeom prst="roundRect">
-            <a:avLst>
-              <a:gd name="adj" fmla="val 40000"/>
-            </a:avLst>
-          </a:prstGeom>
-          <a:solidFill>
-            <a:srgbClr val="C9A961"/>
-          </a:solidFill>
-          <a:ln>
-            <a:noFill/>
-          </a:ln>
-          <a:effectLst/>
-        </p:spPr>
-        <p:style>
-          <a:lnRef idx="1">
-            <a:schemeClr val="accent1"/>
-          </a:lnRef>
-          <a:fillRef idx="3">
-            <a:schemeClr val="accent1"/>
-          </a:fillRef>
-          <a:effectRef idx="2">
-            <a:schemeClr val="accent1"/>
-          </a:effectRef>
-          <a:fontRef idx="minor">
-            <a:schemeClr val="lt1"/>
-          </a:fontRef>
-        </p:style>
-        <p:txBody>
-          <a:bodyPr rtlCol="0" anchor="ctr"/>
-          <a:lstStyle/>
-          <a:p>
-            <a:pPr algn="ctr"/>
-            <a:endParaRPr/>
-          </a:p>
-        </p:txBody>
-      </p:sp>
-      <p:sp>
-        <p:nvSpPr>
-          <p:cNvPr id="31" name="TextBox 30"/>
-          <p:cNvSpPr txBox="1"/>
-          <p:nvPr/>
-        </p:nvSpPr>
-        <p:spPr>
-          <a:xfrm>
-            <a:off x="777240" y="5522976"/>
-            <a:ext cx="3657600" cy="365760"/>
-          </a:xfrm>
-          <a:prstGeom prst="rect">
-            <a:avLst/>
-          </a:prstGeom>
-          <a:noFill/>
-        </p:spPr>
-        <p:txBody>
-          <a:bodyPr wrap="square" lIns="27432" tIns="18288" rIns="27432" bIns="18288" anchor="ctr">
-            <a:spAutoFit/>
-          </a:bodyPr>
-          <a:lstStyle/>
-          <a:p>
-            <a:pPr algn="l">
-              <a:lnSpc>
-                <a:spcPct val="120000"/>
-              </a:lnSpc>
-            </a:pPr>
-            <a:r>
-              <a:rPr sz="1200" b="0" i="0">
-                <a:solidFill>
-                  <a:srgbClr val="14182C"/>
-                </a:solidFill>
-                <a:latin typeface="Calibri"/>
-              </a:rPr>
-              <a:t>Step 7 — Monthly brief</a:t>
-            </a:r>
-          </a:p>
-        </p:txBody>
-      </p:sp>
-      <p:sp>
-        <p:nvSpPr>
-          <p:cNvPr id="32" name="Rounded Rectangle 31"/>
-          <p:cNvSpPr/>
-          <p:nvPr/>
-        </p:nvSpPr>
-        <p:spPr>
-          <a:xfrm>
-            <a:off x="4572000" y="5568696"/>
-            <a:ext cx="1280160" cy="292608"/>
-          </a:xfrm>
-          <a:prstGeom prst="roundRect">
-            <a:avLst>
-              <a:gd name="adj" fmla="val 40000"/>
-            </a:avLst>
-          </a:prstGeom>
-          <a:solidFill>
-            <a:srgbClr val="4B6BBD"/>
-          </a:solidFill>
-          <a:ln>
-            <a:noFill/>
-          </a:ln>
-          <a:effectLst/>
-        </p:spPr>
-        <p:style>
-          <a:lnRef idx="1">
-            <a:schemeClr val="accent1"/>
-          </a:lnRef>
-          <a:fillRef idx="3">
-            <a:schemeClr val="accent1"/>
-          </a:fillRef>
-          <a:effectRef idx="2">
-            <a:schemeClr val="accent1"/>
-          </a:effectRef>
-          <a:fontRef idx="minor">
-            <a:schemeClr val="lt1"/>
-          </a:fontRef>
-        </p:style>
-        <p:txBody>
-          <a:bodyPr rtlCol="0" anchor="ctr"/>
-          <a:lstStyle/>
-          <a:p>
-            <a:pPr algn="ctr"/>
-            <a:endParaRPr/>
-          </a:p>
-        </p:txBody>
-      </p:sp>
-      <p:sp>
-        <p:nvSpPr>
-          <p:cNvPr id="33" name="TextBox 32"/>
-          <p:cNvSpPr txBox="1"/>
-          <p:nvPr/>
-        </p:nvSpPr>
-        <p:spPr>
-          <a:xfrm>
-            <a:off x="4572000" y="5568696"/>
-            <a:ext cx="1280160" cy="292608"/>
-          </a:xfrm>
-          <a:prstGeom prst="rect">
-            <a:avLst/>
-          </a:prstGeom>
-          <a:noFill/>
-        </p:spPr>
-        <p:txBody>
-          <a:bodyPr wrap="square" lIns="27432" tIns="18288" rIns="27432" bIns="18288" anchor="ctr">
-            <a:spAutoFit/>
-          </a:bodyPr>
-          <a:lstStyle/>
-          <a:p>
-            <a:pPr algn="ctr">
-              <a:lnSpc>
-                <a:spcPct val="120000"/>
-              </a:lnSpc>
-            </a:pPr>
-            <a:r>
-              <a:rPr sz="1000" b="1" i="0">
-                <a:solidFill>
-                  <a:srgbClr val="FFFFFF"/>
-                </a:solidFill>
-                <a:latin typeface="Calibri"/>
-              </a:rPr>
-              <a:t>DRAFTED</a:t>
-            </a:r>
-          </a:p>
-        </p:txBody>
-      </p:sp>
-      <p:sp>
-        <p:nvSpPr>
           <p:cNvPr id="34" name="TextBox 33"/>
           <p:cNvSpPr txBox="1"/>
           <p:nvPr/>
@@ -6769,61 +5644,14 @@
       </p:sp>
       <p:sp>
         <p:nvSpPr>
-          <p:cNvPr id="35" name="Rounded Rectangle 34"/>
-          <p:cNvSpPr/>
-          <p:nvPr/>
-        </p:nvSpPr>
-        <p:spPr>
-          <a:xfrm>
-            <a:off x="6153912" y="1417320"/>
-            <a:ext cx="5486400" cy="4846320"/>
-          </a:xfrm>
-          <a:prstGeom prst="roundRect">
-            <a:avLst>
-              <a:gd name="adj" fmla="val 4000"/>
-            </a:avLst>
-          </a:prstGeom>
-          <a:solidFill>
-            <a:srgbClr val="0B1437"/>
-          </a:solidFill>
-          <a:ln>
-            <a:noFill/>
-          </a:ln>
-          <a:effectLst/>
-        </p:spPr>
-        <p:style>
-          <a:lnRef idx="1">
-            <a:schemeClr val="accent1"/>
-          </a:lnRef>
-          <a:fillRef idx="3">
-            <a:schemeClr val="accent1"/>
-          </a:fillRef>
-          <a:effectRef idx="2">
-            <a:schemeClr val="accent1"/>
-          </a:effectRef>
-          <a:fontRef idx="minor">
-            <a:schemeClr val="lt1"/>
-          </a:fontRef>
-        </p:style>
-        <p:txBody>
-          <a:bodyPr rtlCol="0" anchor="ctr"/>
-          <a:lstStyle/>
-          <a:p>
-            <a:pPr algn="ctr"/>
-            <a:endParaRPr/>
-          </a:p>
-        </p:txBody>
-      </p:sp>
-      <p:sp>
-        <p:nvSpPr>
-          <p:cNvPr id="36" name="TextBox 35"/>
-          <p:cNvSpPr txBox="1"/>
-          <p:nvPr/>
-        </p:nvSpPr>
-        <p:spPr>
-          <a:xfrm>
-            <a:off x="6382512" y="1600200"/>
-            <a:ext cx="5029200" cy="365760"/>
+          <p:cNvPr id="41" name="TextBox 40"/>
+          <p:cNvSpPr txBox="1"/>
+          <p:nvPr/>
+        </p:nvSpPr>
+        <p:spPr>
+          <a:xfrm>
+            <a:off x="5473701" y="6419088"/>
+            <a:ext cx="2543078" cy="226537"/>
           </a:xfrm>
           <a:prstGeom prst="rect">
             <a:avLst/>
@@ -6842,121 +5670,42 @@
               </a:lnSpc>
             </a:pPr>
             <a:r>
-              <a:rPr sz="1100" b="1" i="0">
-                <a:solidFill>
-                  <a:srgbClr val="C9A961"/>
-                </a:solidFill>
-                <a:latin typeface="Calibri"/>
-              </a:rPr>
-              <a:t>ARTEFACTS FOR JUDGES</a:t>
-            </a:r>
-          </a:p>
-        </p:txBody>
-      </p:sp>
-      <p:sp>
-        <p:nvSpPr>
-          <p:cNvPr id="37" name="Rounded Rectangle 36"/>
-          <p:cNvSpPr/>
-          <p:nvPr/>
-        </p:nvSpPr>
-        <p:spPr>
-          <a:xfrm>
-            <a:off x="6382512" y="2011680"/>
-            <a:ext cx="5029200" cy="2194560"/>
-          </a:xfrm>
-          <a:prstGeom prst="roundRect">
-            <a:avLst>
-              <a:gd name="adj" fmla="val 4000"/>
-            </a:avLst>
-          </a:prstGeom>
-          <a:solidFill>
-            <a:srgbClr val="F5F6FA"/>
-          </a:solidFill>
-          <a:ln w="19050">
-            <a:solidFill>
-              <a:srgbClr val="C9A961"/>
-            </a:solidFill>
-          </a:ln>
-          <a:effectLst/>
-        </p:spPr>
-        <p:style>
-          <a:lnRef idx="1">
-            <a:schemeClr val="accent1"/>
-          </a:lnRef>
-          <a:fillRef idx="3">
-            <a:schemeClr val="accent1"/>
-          </a:fillRef>
-          <a:effectRef idx="2">
-            <a:schemeClr val="accent1"/>
-          </a:effectRef>
-          <a:fontRef idx="minor">
-            <a:schemeClr val="lt1"/>
-          </a:fontRef>
-        </p:style>
-        <p:txBody>
-          <a:bodyPr rtlCol="0" anchor="ctr"/>
-          <a:lstStyle/>
-          <a:p>
-            <a:pPr algn="ctr"/>
-            <a:endParaRPr/>
-          </a:p>
-        </p:txBody>
-      </p:sp>
-      <p:sp>
-        <p:nvSpPr>
-          <p:cNvPr id="40" name="Oval 39"/>
-          <p:cNvSpPr/>
-          <p:nvPr/>
-        </p:nvSpPr>
-        <p:spPr>
-          <a:xfrm>
-            <a:off x="6382512" y="5054003"/>
-            <a:ext cx="146304" cy="120913"/>
-          </a:xfrm>
-          <a:prstGeom prst="ellipse">
-            <a:avLst/>
-          </a:prstGeom>
-          <a:solidFill>
-            <a:srgbClr val="C9A961"/>
-          </a:solidFill>
-          <a:ln>
-            <a:noFill/>
-          </a:ln>
-          <a:effectLst/>
-        </p:spPr>
-        <p:style>
-          <a:lnRef idx="1">
-            <a:schemeClr val="accent1"/>
-          </a:lnRef>
-          <a:fillRef idx="3">
-            <a:schemeClr val="accent1"/>
-          </a:fillRef>
-          <a:effectRef idx="2">
-            <a:schemeClr val="accent1"/>
-          </a:effectRef>
-          <a:fontRef idx="minor">
-            <a:schemeClr val="lt1"/>
-          </a:fontRef>
-        </p:style>
-        <p:txBody>
-          <a:bodyPr rtlCol="0" anchor="ctr"/>
-          <a:lstStyle/>
-          <a:p>
-            <a:pPr algn="ctr"/>
-            <a:endParaRPr/>
-          </a:p>
-        </p:txBody>
-      </p:sp>
-      <p:sp>
-        <p:nvSpPr>
-          <p:cNvPr id="41" name="TextBox 40"/>
-          <p:cNvSpPr txBox="1"/>
-          <p:nvPr/>
-        </p:nvSpPr>
-        <p:spPr>
-          <a:xfrm>
-            <a:off x="6629400" y="4999895"/>
-            <a:ext cx="1828800" cy="302281"/>
+              <a:rPr sz="1100" b="1" i="0" dirty="0">
+                <a:solidFill>
+                  <a:srgbClr val="FF0000"/>
+                </a:solidFill>
+                <a:latin typeface="Calibri"/>
+              </a:rPr>
+              <a:t>Public repo</a:t>
+            </a:r>
+            <a:r>
+              <a:rPr lang="en-US" sz="1100" b="1" i="0" dirty="0">
+                <a:solidFill>
+                  <a:srgbClr val="FF0000"/>
+                </a:solidFill>
+                <a:latin typeface="Calibri"/>
+              </a:rPr>
+              <a:t> Link:</a:t>
+            </a:r>
+            <a:endParaRPr sz="1100" b="1" i="0" dirty="0">
+              <a:solidFill>
+                <a:srgbClr val="FF0000"/>
+              </a:solidFill>
+              <a:latin typeface="Calibri"/>
+            </a:endParaRPr>
+          </a:p>
+        </p:txBody>
+      </p:sp>
+      <p:sp>
+        <p:nvSpPr>
+          <p:cNvPr id="42" name="TextBox 41"/>
+          <p:cNvSpPr txBox="1"/>
+          <p:nvPr/>
+        </p:nvSpPr>
+        <p:spPr>
+          <a:xfrm>
+            <a:off x="6522722" y="6419088"/>
+            <a:ext cx="4196078" cy="208390"/>
           </a:xfrm>
           <a:prstGeom prst="rect">
             <a:avLst/>
@@ -6975,48 +5724,9 @@
               </a:lnSpc>
             </a:pPr>
             <a:r>
-              <a:rPr sz="1100" b="1" i="0">
-                <a:solidFill>
-                  <a:srgbClr val="FFFFFF"/>
-                </a:solidFill>
-                <a:latin typeface="Calibri"/>
-              </a:rPr>
-              <a:t>Public repo</a:t>
-            </a:r>
-          </a:p>
-        </p:txBody>
-      </p:sp>
-      <p:sp>
-        <p:nvSpPr>
-          <p:cNvPr id="42" name="TextBox 41"/>
-          <p:cNvSpPr txBox="1"/>
-          <p:nvPr/>
-        </p:nvSpPr>
-        <p:spPr>
-          <a:xfrm>
-            <a:off x="8503920" y="4999895"/>
-            <a:ext cx="3017520" cy="302281"/>
-          </a:xfrm>
-          <a:prstGeom prst="rect">
-            <a:avLst/>
-          </a:prstGeom>
-          <a:noFill/>
-        </p:spPr>
-        <p:txBody>
-          <a:bodyPr wrap="square" lIns="27432" tIns="18288" rIns="27432" bIns="18288" anchor="t">
-            <a:spAutoFit/>
-          </a:bodyPr>
-          <a:lstStyle/>
-          <a:p>
-            <a:pPr algn="l">
-              <a:lnSpc>
-                <a:spcPct val="120000"/>
-              </a:lnSpc>
-            </a:pPr>
-            <a:r>
               <a:rPr sz="1000" b="0" i="0" dirty="0" err="1">
                 <a:solidFill>
-                  <a:srgbClr val="E8D49A"/>
+                  <a:srgbClr val="FF0000"/>
                 </a:solidFill>
                 <a:latin typeface="Consolas"/>
               </a:rPr>
@@ -7025,7 +5735,7 @@
             <a:r>
               <a:rPr sz="1000" b="0" i="0" dirty="0">
                 <a:solidFill>
-                  <a:srgbClr val="E8D49A"/>
+                  <a:srgbClr val="FF0000"/>
                 </a:solidFill>
                 <a:latin typeface="Consolas"/>
               </a:rPr>
@@ -7112,65 +5822,43 @@
           </a:p>
         </p:txBody>
       </p:sp>
-      <p:sp>
-        <p:nvSpPr>
-          <p:cNvPr id="54" name="Rounded Rectangle 53">
+      <p:pic>
+        <p:nvPicPr>
+          <p:cNvPr id="27" name="Picture 26">
             <a:extLst>
               <a:ext uri="{FF2B5EF4-FFF2-40B4-BE49-F238E27FC236}">
-                <a16:creationId xmlns:a16="http://schemas.microsoft.com/office/drawing/2014/main" id="{6D18EF79-E22D-772E-705B-1C7549C672B4}"/>
+                <a16:creationId xmlns:a16="http://schemas.microsoft.com/office/drawing/2014/main" id="{FC5431FA-B677-48A5-EFF4-D9BA112A8617}"/>
               </a:ext>
             </a:extLst>
           </p:cNvPr>
-          <p:cNvSpPr/>
-          <p:nvPr/>
-        </p:nvSpPr>
-        <p:spPr>
-          <a:xfrm>
-            <a:off x="4572000" y="4249757"/>
-            <a:ext cx="1280160" cy="292608"/>
-          </a:xfrm>
-          <a:prstGeom prst="roundRect">
-            <a:avLst>
-              <a:gd name="adj" fmla="val 40000"/>
-            </a:avLst>
-          </a:prstGeom>
-          <a:solidFill>
-            <a:srgbClr val="2C8A5D"/>
-          </a:solidFill>
-          <a:ln>
-            <a:noFill/>
-          </a:ln>
-          <a:effectLst/>
-        </p:spPr>
-        <p:style>
-          <a:lnRef idx="1">
-            <a:schemeClr val="accent1"/>
-          </a:lnRef>
-          <a:fillRef idx="3">
-            <a:schemeClr val="accent1"/>
-          </a:fillRef>
-          <a:effectRef idx="2">
-            <a:schemeClr val="accent1"/>
-          </a:effectRef>
-          <a:fontRef idx="minor">
-            <a:schemeClr val="lt1"/>
-          </a:fontRef>
-        </p:style>
-        <p:txBody>
-          <a:bodyPr rtlCol="0" anchor="ctr"/>
-          <a:lstStyle/>
-          <a:p>
-            <a:pPr algn="ctr"/>
-            <a:endParaRPr/>
-          </a:p>
-        </p:txBody>
-      </p:sp>
-      <p:sp>
-        <p:nvSpPr>
-          <p:cNvPr id="55" name="TextBox 54">
+          <p:cNvPicPr>
+            <a:picLocks noChangeAspect="1"/>
+          </p:cNvPicPr>
+          <p:nvPr/>
+        </p:nvPicPr>
+        <p:blipFill>
+          <a:blip r:embed="rId2"/>
+          <a:srcRect l="22788" t="54073" r="8775" b="6660"/>
+          <a:stretch>
+            <a:fillRect/>
+          </a:stretch>
+        </p:blipFill>
+        <p:spPr>
+          <a:xfrm>
+            <a:off x="45720" y="2111740"/>
+            <a:ext cx="12366126" cy="3374660"/>
+          </a:xfrm>
+          <a:prstGeom prst="rect">
+            <a:avLst/>
+          </a:prstGeom>
+        </p:spPr>
+      </p:pic>
+      <p:sp>
+        <p:nvSpPr>
+          <p:cNvPr id="30" name="TextBox 29">
             <a:extLst>
               <a:ext uri="{FF2B5EF4-FFF2-40B4-BE49-F238E27FC236}">
-                <a16:creationId xmlns:a16="http://schemas.microsoft.com/office/drawing/2014/main" id="{F4023535-51C8-B71D-D359-84628D7F2E57}"/>
+                <a16:creationId xmlns:a16="http://schemas.microsoft.com/office/drawing/2014/main" id="{20356FF0-B17B-5D33-403F-C60023EA634E}"/>
               </a:ext>
             </a:extLst>
           </p:cNvPr>
@@ -7179,96 +5867,78 @@
         </p:nvSpPr>
         <p:spPr>
           <a:xfrm>
-            <a:off x="4572000" y="4249757"/>
-            <a:ext cx="1280160" cy="292608"/>
-          </a:xfrm>
-          <a:prstGeom prst="rect">
-            <a:avLst/>
-          </a:prstGeom>
-          <a:noFill/>
-        </p:spPr>
-        <p:txBody>
-          <a:bodyPr wrap="square" lIns="27432" tIns="18288" rIns="27432" bIns="18288" anchor="ctr">
-            <a:spAutoFit/>
-          </a:bodyPr>
-          <a:lstStyle/>
-          <a:p>
-            <a:pPr algn="ctr">
-              <a:lnSpc>
-                <a:spcPct val="120000"/>
-              </a:lnSpc>
-            </a:pPr>
-            <a:r>
-              <a:rPr sz="1000" b="1" i="0">
-                <a:solidFill>
-                  <a:srgbClr val="FFFFFF"/>
-                </a:solidFill>
-                <a:latin typeface="Calibri"/>
-              </a:rPr>
-              <a:t>LIVE</a:t>
-            </a:r>
-          </a:p>
-        </p:txBody>
-      </p:sp>
-      <p:sp>
-        <p:nvSpPr>
-          <p:cNvPr id="56" name="Rounded Rectangle 55">
+            <a:off x="822960" y="2475924"/>
+            <a:ext cx="1285240" cy="600164"/>
+          </a:xfrm>
+          <a:prstGeom prst="rect">
+            <a:avLst/>
+          </a:prstGeom>
+          <a:noFill/>
+        </p:spPr>
+        <p:txBody>
+          <a:bodyPr wrap="square" rtlCol="0">
+            <a:spAutoFit/>
+          </a:bodyPr>
+          <a:lstStyle/>
+          <a:p>
+            <a:pPr algn="ctr"/>
+            <a:r>
+              <a:rPr lang="en-US" sz="1100" dirty="0">
+                <a:solidFill>
+                  <a:srgbClr val="FF0000"/>
+                </a:solidFill>
+              </a:rPr>
+              <a:t>Receive customer Query passed to AI along with KB</a:t>
+            </a:r>
+          </a:p>
+        </p:txBody>
+      </p:sp>
+      <p:sp>
+        <p:nvSpPr>
+          <p:cNvPr id="38" name="TextBox 37">
             <a:extLst>
               <a:ext uri="{FF2B5EF4-FFF2-40B4-BE49-F238E27FC236}">
-                <a16:creationId xmlns:a16="http://schemas.microsoft.com/office/drawing/2014/main" id="{389238B5-1B4F-5408-E3CD-A356BA91CC7F}"/>
+                <a16:creationId xmlns:a16="http://schemas.microsoft.com/office/drawing/2014/main" id="{B0C044E3-2050-9244-A46A-F97383E82C09}"/>
               </a:ext>
             </a:extLst>
           </p:cNvPr>
-          <p:cNvSpPr/>
-          <p:nvPr/>
-        </p:nvSpPr>
-        <p:spPr>
-          <a:xfrm>
-            <a:off x="4572000" y="4688669"/>
-            <a:ext cx="1280160" cy="292608"/>
-          </a:xfrm>
-          <a:prstGeom prst="roundRect">
-            <a:avLst>
-              <a:gd name="adj" fmla="val 40000"/>
-            </a:avLst>
-          </a:prstGeom>
-          <a:solidFill>
-            <a:srgbClr val="2C8A5D"/>
-          </a:solidFill>
-          <a:ln>
-            <a:noFill/>
-          </a:ln>
-          <a:effectLst/>
-        </p:spPr>
-        <p:style>
-          <a:lnRef idx="1">
-            <a:schemeClr val="accent1"/>
-          </a:lnRef>
-          <a:fillRef idx="3">
-            <a:schemeClr val="accent1"/>
-          </a:fillRef>
-          <a:effectRef idx="2">
-            <a:schemeClr val="accent1"/>
-          </a:effectRef>
-          <a:fontRef idx="minor">
-            <a:schemeClr val="lt1"/>
-          </a:fontRef>
-        </p:style>
-        <p:txBody>
-          <a:bodyPr rtlCol="0" anchor="ctr"/>
+          <p:cNvSpPr txBox="1"/>
+          <p:nvPr/>
+        </p:nvSpPr>
+        <p:spPr>
+          <a:xfrm>
+            <a:off x="2606040" y="2275766"/>
+            <a:ext cx="1826260" cy="769441"/>
+          </a:xfrm>
+          <a:prstGeom prst="rect">
+            <a:avLst/>
+          </a:prstGeom>
+          <a:noFill/>
+        </p:spPr>
+        <p:txBody>
+          <a:bodyPr wrap="square" rtlCol="0">
+            <a:spAutoFit/>
+          </a:bodyPr>
           <a:lstStyle/>
           <a:p>
             <a:pPr algn="ctr"/>
-            <a:endParaRPr/>
-          </a:p>
-        </p:txBody>
-      </p:sp>
-      <p:sp>
-        <p:nvSpPr>
-          <p:cNvPr id="57" name="TextBox 56">
+            <a:r>
+              <a:rPr lang="en-US" sz="1100" dirty="0">
+                <a:solidFill>
+                  <a:srgbClr val="FF0000"/>
+                </a:solidFill>
+              </a:rPr>
+              <a:t>AI identifies Category of case, persona, KB retrieval, potential response (only for available KB)</a:t>
+            </a:r>
+          </a:p>
+        </p:txBody>
+      </p:sp>
+      <p:sp>
+        <p:nvSpPr>
+          <p:cNvPr id="39" name="TextBox 38">
             <a:extLst>
               <a:ext uri="{FF2B5EF4-FFF2-40B4-BE49-F238E27FC236}">
-                <a16:creationId xmlns:a16="http://schemas.microsoft.com/office/drawing/2014/main" id="{082C0459-C4CE-F3B2-25E3-C34414DA11E8}"/>
+                <a16:creationId xmlns:a16="http://schemas.microsoft.com/office/drawing/2014/main" id="{BDFABC31-4E20-247F-BABB-BD651465446F}"/>
               </a:ext>
             </a:extLst>
           </p:cNvPr>
@@ -7277,96 +5947,156 @@
         </p:nvSpPr>
         <p:spPr>
           <a:xfrm>
-            <a:off x="4572000" y="4688669"/>
-            <a:ext cx="1280160" cy="292608"/>
-          </a:xfrm>
-          <a:prstGeom prst="rect">
-            <a:avLst/>
-          </a:prstGeom>
-          <a:noFill/>
-        </p:spPr>
-        <p:txBody>
-          <a:bodyPr wrap="square" lIns="27432" tIns="18288" rIns="27432" bIns="18288" anchor="ctr">
-            <a:spAutoFit/>
-          </a:bodyPr>
-          <a:lstStyle/>
-          <a:p>
-            <a:pPr algn="ctr">
-              <a:lnSpc>
-                <a:spcPct val="120000"/>
-              </a:lnSpc>
-            </a:pPr>
-            <a:r>
-              <a:rPr sz="1000" b="1" i="0">
-                <a:solidFill>
-                  <a:srgbClr val="FFFFFF"/>
-                </a:solidFill>
-                <a:latin typeface="Calibri"/>
-              </a:rPr>
-              <a:t>LIVE</a:t>
-            </a:r>
-          </a:p>
-        </p:txBody>
-      </p:sp>
-      <p:sp>
-        <p:nvSpPr>
-          <p:cNvPr id="58" name="Rounded Rectangle 57">
+            <a:off x="9733280" y="2060322"/>
+            <a:ext cx="1285240" cy="430887"/>
+          </a:xfrm>
+          <a:prstGeom prst="rect">
+            <a:avLst/>
+          </a:prstGeom>
+          <a:noFill/>
+        </p:spPr>
+        <p:txBody>
+          <a:bodyPr wrap="square" rtlCol="0">
+            <a:spAutoFit/>
+          </a:bodyPr>
+          <a:lstStyle/>
+          <a:p>
+            <a:pPr algn="ctr"/>
+            <a:r>
+              <a:rPr lang="en-US" sz="1100" dirty="0">
+                <a:solidFill>
+                  <a:srgbClr val="FF0000"/>
+                </a:solidFill>
+              </a:rPr>
+              <a:t>Get CS to approve message</a:t>
+            </a:r>
+          </a:p>
+        </p:txBody>
+      </p:sp>
+      <p:sp>
+        <p:nvSpPr>
+          <p:cNvPr id="44" name="TextBox 43">
             <a:extLst>
               <a:ext uri="{FF2B5EF4-FFF2-40B4-BE49-F238E27FC236}">
-                <a16:creationId xmlns:a16="http://schemas.microsoft.com/office/drawing/2014/main" id="{09A4788D-8100-8F9E-F0F0-4A214AA3D532}"/>
+                <a16:creationId xmlns:a16="http://schemas.microsoft.com/office/drawing/2014/main" id="{24622AE1-4E02-413F-33D8-7B43CD58A454}"/>
               </a:ext>
             </a:extLst>
           </p:cNvPr>
-          <p:cNvSpPr/>
-          <p:nvPr/>
-        </p:nvSpPr>
-        <p:spPr>
-          <a:xfrm>
-            <a:off x="4572000" y="5127581"/>
-            <a:ext cx="1280160" cy="292608"/>
-          </a:xfrm>
-          <a:prstGeom prst="roundRect">
-            <a:avLst>
-              <a:gd name="adj" fmla="val 40000"/>
-            </a:avLst>
-          </a:prstGeom>
-          <a:solidFill>
-            <a:srgbClr val="2C8A5D"/>
-          </a:solidFill>
+          <p:cNvSpPr txBox="1"/>
+          <p:nvPr/>
+        </p:nvSpPr>
+        <p:spPr>
+          <a:xfrm>
+            <a:off x="5329556" y="1643896"/>
+            <a:ext cx="6582410" cy="1785104"/>
+          </a:xfrm>
+          <a:prstGeom prst="rect">
+            <a:avLst/>
+          </a:prstGeom>
+          <a:noFill/>
           <a:ln>
-            <a:noFill/>
+            <a:solidFill>
+              <a:srgbClr val="00B050"/>
+            </a:solidFill>
+            <a:prstDash val="dash"/>
           </a:ln>
-          <a:effectLst/>
-        </p:spPr>
-        <p:style>
-          <a:lnRef idx="1">
-            <a:schemeClr val="accent1"/>
-          </a:lnRef>
-          <a:fillRef idx="3">
-            <a:schemeClr val="accent1"/>
-          </a:fillRef>
-          <a:effectRef idx="2">
-            <a:schemeClr val="accent1"/>
-          </a:effectRef>
-          <a:fontRef idx="minor">
-            <a:schemeClr val="lt1"/>
-          </a:fontRef>
-        </p:style>
-        <p:txBody>
-          <a:bodyPr rtlCol="0" anchor="ctr"/>
+        </p:spPr>
+        <p:txBody>
+          <a:bodyPr wrap="square" rtlCol="0">
+            <a:spAutoFit/>
+          </a:bodyPr>
           <a:lstStyle/>
           <a:p>
             <a:pPr algn="ctr"/>
-            <a:endParaRPr/>
-          </a:p>
-        </p:txBody>
-      </p:sp>
-      <p:sp>
-        <p:nvSpPr>
-          <p:cNvPr id="59" name="TextBox 58">
+            <a:r>
+              <a:rPr lang="en-US" sz="1100" dirty="0">
+                <a:solidFill>
+                  <a:srgbClr val="FF0000"/>
+                </a:solidFill>
+              </a:rPr>
+              <a:t>IF high confidence of KB response</a:t>
+            </a:r>
+          </a:p>
+          <a:p>
+            <a:pPr algn="ctr"/>
+            <a:endParaRPr lang="en-US" sz="1100" dirty="0">
+              <a:solidFill>
+                <a:srgbClr val="FF0000"/>
+              </a:solidFill>
+            </a:endParaRPr>
+          </a:p>
+          <a:p>
+            <a:pPr algn="ctr"/>
+            <a:endParaRPr lang="en-US" sz="1100" dirty="0">
+              <a:solidFill>
+                <a:srgbClr val="FF0000"/>
+              </a:solidFill>
+            </a:endParaRPr>
+          </a:p>
+          <a:p>
+            <a:pPr algn="ctr"/>
+            <a:endParaRPr lang="en-US" sz="1100" dirty="0">
+              <a:solidFill>
+                <a:srgbClr val="FF0000"/>
+              </a:solidFill>
+            </a:endParaRPr>
+          </a:p>
+          <a:p>
+            <a:pPr algn="ctr"/>
+            <a:endParaRPr lang="en-US" sz="1100" dirty="0">
+              <a:solidFill>
+                <a:srgbClr val="FF0000"/>
+              </a:solidFill>
+            </a:endParaRPr>
+          </a:p>
+          <a:p>
+            <a:pPr algn="ctr"/>
+            <a:endParaRPr lang="en-US" sz="1100" dirty="0">
+              <a:solidFill>
+                <a:srgbClr val="FF0000"/>
+              </a:solidFill>
+            </a:endParaRPr>
+          </a:p>
+          <a:p>
+            <a:pPr algn="ctr"/>
+            <a:endParaRPr lang="en-US" sz="1100" dirty="0">
+              <a:solidFill>
+                <a:srgbClr val="FF0000"/>
+              </a:solidFill>
+            </a:endParaRPr>
+          </a:p>
+          <a:p>
+            <a:pPr algn="ctr"/>
+            <a:endParaRPr lang="en-US" sz="1100" dirty="0">
+              <a:solidFill>
+                <a:srgbClr val="FF0000"/>
+              </a:solidFill>
+            </a:endParaRPr>
+          </a:p>
+          <a:p>
+            <a:pPr algn="ctr"/>
+            <a:endParaRPr lang="en-US" sz="1100" dirty="0">
+              <a:solidFill>
+                <a:srgbClr val="FF0000"/>
+              </a:solidFill>
+            </a:endParaRPr>
+          </a:p>
+          <a:p>
+            <a:pPr algn="ctr"/>
+            <a:endParaRPr lang="en-US" sz="1100" dirty="0">
+              <a:solidFill>
+                <a:srgbClr val="FF0000"/>
+              </a:solidFill>
+            </a:endParaRPr>
+          </a:p>
+        </p:txBody>
+      </p:sp>
+      <p:sp>
+        <p:nvSpPr>
+          <p:cNvPr id="45" name="TextBox 44">
             <a:extLst>
               <a:ext uri="{FF2B5EF4-FFF2-40B4-BE49-F238E27FC236}">
-                <a16:creationId xmlns:a16="http://schemas.microsoft.com/office/drawing/2014/main" id="{7222FCC1-000F-5ED6-9289-CA85038E30EC}"/>
+                <a16:creationId xmlns:a16="http://schemas.microsoft.com/office/drawing/2014/main" id="{D5A5E634-9711-DB44-E14A-A30D1ED5E1C0}"/>
               </a:ext>
             </a:extLst>
           </p:cNvPr>
@@ -7375,132 +6105,107 @@
         </p:nvSpPr>
         <p:spPr>
           <a:xfrm>
-            <a:off x="4572000" y="5127581"/>
-            <a:ext cx="1280160" cy="292608"/>
-          </a:xfrm>
-          <a:prstGeom prst="rect">
-            <a:avLst/>
-          </a:prstGeom>
-          <a:noFill/>
-        </p:spPr>
-        <p:txBody>
-          <a:bodyPr wrap="square" lIns="27432" tIns="18288" rIns="27432" bIns="18288" anchor="ctr">
-            <a:spAutoFit/>
-          </a:bodyPr>
-          <a:lstStyle/>
-          <a:p>
-            <a:pPr algn="ctr">
-              <a:lnSpc>
-                <a:spcPct val="120000"/>
-              </a:lnSpc>
-            </a:pPr>
-            <a:r>
-              <a:rPr sz="1000" b="1" i="0">
-                <a:solidFill>
-                  <a:srgbClr val="FFFFFF"/>
-                </a:solidFill>
-                <a:latin typeface="Calibri"/>
-              </a:rPr>
-              <a:t>LIVE</a:t>
-            </a:r>
-          </a:p>
-        </p:txBody>
-      </p:sp>
-      <p:sp>
-        <p:nvSpPr>
-          <p:cNvPr id="60" name="Rounded Rectangle 59">
-            <a:extLst>
-              <a:ext uri="{FF2B5EF4-FFF2-40B4-BE49-F238E27FC236}">
-                <a16:creationId xmlns:a16="http://schemas.microsoft.com/office/drawing/2014/main" id="{42E6D2E3-AE92-35DE-562E-411AB529F00F}"/>
-              </a:ext>
-            </a:extLst>
-          </p:cNvPr>
-          <p:cNvSpPr/>
-          <p:nvPr/>
-        </p:nvSpPr>
-        <p:spPr>
-          <a:xfrm>
-            <a:off x="4572000" y="5566493"/>
-            <a:ext cx="1280160" cy="292608"/>
-          </a:xfrm>
-          <a:prstGeom prst="roundRect">
-            <a:avLst>
-              <a:gd name="adj" fmla="val 40000"/>
-            </a:avLst>
-          </a:prstGeom>
-          <a:solidFill>
-            <a:srgbClr val="2C8A5D"/>
-          </a:solidFill>
+            <a:off x="5329556" y="3548896"/>
+            <a:ext cx="6582410" cy="1785104"/>
+          </a:xfrm>
+          <a:prstGeom prst="rect">
+            <a:avLst/>
+          </a:prstGeom>
+          <a:noFill/>
           <a:ln>
-            <a:noFill/>
+            <a:solidFill>
+              <a:srgbClr val="00B050"/>
+            </a:solidFill>
+            <a:prstDash val="dash"/>
           </a:ln>
-          <a:effectLst/>
-        </p:spPr>
-        <p:style>
-          <a:lnRef idx="1">
-            <a:schemeClr val="accent1"/>
-          </a:lnRef>
-          <a:fillRef idx="3">
-            <a:schemeClr val="accent1"/>
-          </a:fillRef>
-          <a:effectRef idx="2">
-            <a:schemeClr val="accent1"/>
-          </a:effectRef>
-          <a:fontRef idx="minor">
-            <a:schemeClr val="lt1"/>
-          </a:fontRef>
-        </p:style>
-        <p:txBody>
-          <a:bodyPr rtlCol="0" anchor="ctr"/>
+        </p:spPr>
+        <p:txBody>
+          <a:bodyPr wrap="square" rtlCol="0">
+            <a:spAutoFit/>
+          </a:bodyPr>
           <a:lstStyle/>
           <a:p>
             <a:pPr algn="ctr"/>
-            <a:endParaRPr/>
-          </a:p>
-        </p:txBody>
-      </p:sp>
-      <p:sp>
-        <p:nvSpPr>
-          <p:cNvPr id="61" name="TextBox 60">
-            <a:extLst>
-              <a:ext uri="{FF2B5EF4-FFF2-40B4-BE49-F238E27FC236}">
-                <a16:creationId xmlns:a16="http://schemas.microsoft.com/office/drawing/2014/main" id="{CAE6D959-79FC-B4C8-929F-761001068B06}"/>
-              </a:ext>
-            </a:extLst>
-          </p:cNvPr>
-          <p:cNvSpPr txBox="1"/>
-          <p:nvPr/>
-        </p:nvSpPr>
-        <p:spPr>
-          <a:xfrm>
-            <a:off x="4572000" y="5566493"/>
-            <a:ext cx="1280160" cy="292608"/>
-          </a:xfrm>
-          <a:prstGeom prst="rect">
-            <a:avLst/>
-          </a:prstGeom>
-          <a:noFill/>
-        </p:spPr>
-        <p:txBody>
-          <a:bodyPr wrap="square" lIns="27432" tIns="18288" rIns="27432" bIns="18288" anchor="ctr">
-            <a:spAutoFit/>
-          </a:bodyPr>
-          <a:lstStyle/>
-          <a:p>
-            <a:pPr algn="ctr">
-              <a:lnSpc>
-                <a:spcPct val="120000"/>
-              </a:lnSpc>
-            </a:pPr>
-            <a:r>
-              <a:rPr sz="1000" b="1" i="0">
-                <a:solidFill>
-                  <a:srgbClr val="FFFFFF"/>
-                </a:solidFill>
-                <a:latin typeface="Calibri"/>
-              </a:rPr>
-              <a:t>LIVE</a:t>
-            </a:r>
+            <a:r>
+              <a:rPr lang="en-US" sz="1100" dirty="0">
+                <a:solidFill>
+                  <a:srgbClr val="FF0000"/>
+                </a:solidFill>
+              </a:rPr>
+              <a:t>IF low confidence of KB response</a:t>
+            </a:r>
+          </a:p>
+          <a:p>
+            <a:pPr algn="ctr"/>
+            <a:endParaRPr lang="en-US" sz="1100" dirty="0">
+              <a:solidFill>
+                <a:srgbClr val="FF0000"/>
+              </a:solidFill>
+            </a:endParaRPr>
+          </a:p>
+          <a:p>
+            <a:pPr algn="ctr"/>
+            <a:endParaRPr lang="en-US" sz="1100" dirty="0">
+              <a:solidFill>
+                <a:srgbClr val="FF0000"/>
+              </a:solidFill>
+            </a:endParaRPr>
+          </a:p>
+          <a:p>
+            <a:pPr algn="ctr"/>
+            <a:endParaRPr lang="en-US" sz="1100" dirty="0">
+              <a:solidFill>
+                <a:srgbClr val="FF0000"/>
+              </a:solidFill>
+            </a:endParaRPr>
+          </a:p>
+          <a:p>
+            <a:pPr algn="ctr"/>
+            <a:endParaRPr lang="en-US" sz="1100" dirty="0">
+              <a:solidFill>
+                <a:srgbClr val="FF0000"/>
+              </a:solidFill>
+            </a:endParaRPr>
+          </a:p>
+          <a:p>
+            <a:pPr algn="ctr"/>
+            <a:endParaRPr lang="en-US" sz="1100" dirty="0">
+              <a:solidFill>
+                <a:srgbClr val="FF0000"/>
+              </a:solidFill>
+            </a:endParaRPr>
+          </a:p>
+          <a:p>
+            <a:pPr algn="ctr"/>
+            <a:endParaRPr lang="en-US" sz="1100" dirty="0">
+              <a:solidFill>
+                <a:srgbClr val="FF0000"/>
+              </a:solidFill>
+            </a:endParaRPr>
+          </a:p>
+          <a:p>
+            <a:pPr algn="ctr"/>
+            <a:endParaRPr lang="en-US" sz="1100" dirty="0">
+              <a:solidFill>
+                <a:srgbClr val="FF0000"/>
+              </a:solidFill>
+            </a:endParaRPr>
+          </a:p>
+          <a:p>
+            <a:pPr algn="ctr"/>
+            <a:endParaRPr lang="en-US" sz="1100" dirty="0">
+              <a:solidFill>
+                <a:srgbClr val="FF0000"/>
+              </a:solidFill>
+            </a:endParaRPr>
+          </a:p>
+          <a:p>
+            <a:pPr algn="ctr"/>
+            <a:endParaRPr lang="en-US" sz="1100" dirty="0">
+              <a:solidFill>
+                <a:srgbClr val="FF0000"/>
+              </a:solidFill>
+            </a:endParaRPr>
           </a:p>
         </p:txBody>
       </p:sp>
@@ -7513,6 +6218,918 @@
 </file>
 
 <file path=ppt/slides/slide12.xml><?xml version="1.0" encoding="utf-8"?>
+<p:sld xmlns:a="http://schemas.openxmlformats.org/drawingml/2006/main" xmlns:r="http://schemas.openxmlformats.org/officeDocument/2006/relationships" xmlns:p="http://schemas.openxmlformats.org/presentationml/2006/main">
+  <p:cSld>
+    <p:spTree>
+      <p:nvGrpSpPr>
+        <p:cNvPr id="1" name="">
+          <a:extLst>
+            <a:ext uri="{FF2B5EF4-FFF2-40B4-BE49-F238E27FC236}">
+              <a16:creationId xmlns:a16="http://schemas.microsoft.com/office/drawing/2014/main" id="{A169C146-D1EA-63B2-B642-361CCE38223F}"/>
+            </a:ext>
+          </a:extLst>
+        </p:cNvPr>
+        <p:cNvGrpSpPr/>
+        <p:nvPr/>
+      </p:nvGrpSpPr>
+      <p:grpSpPr>
+        <a:xfrm>
+          <a:off x="0" y="0"/>
+          <a:ext cx="0" cy="0"/>
+          <a:chOff x="0" y="0"/>
+          <a:chExt cx="0" cy="0"/>
+        </a:xfrm>
+      </p:grpSpPr>
+      <p:sp>
+        <p:nvSpPr>
+          <p:cNvPr id="2" name="TextBox 1">
+            <a:extLst>
+              <a:ext uri="{FF2B5EF4-FFF2-40B4-BE49-F238E27FC236}">
+                <a16:creationId xmlns:a16="http://schemas.microsoft.com/office/drawing/2014/main" id="{D3274294-C0F6-0A83-1998-FB2AC77BED12}"/>
+              </a:ext>
+            </a:extLst>
+          </p:cNvPr>
+          <p:cNvSpPr txBox="1"/>
+          <p:nvPr/>
+        </p:nvSpPr>
+        <p:spPr>
+          <a:xfrm>
+            <a:off x="548640" y="320040"/>
+            <a:ext cx="10972800" cy="320040"/>
+          </a:xfrm>
+          <a:prstGeom prst="rect">
+            <a:avLst/>
+          </a:prstGeom>
+          <a:noFill/>
+        </p:spPr>
+        <p:txBody>
+          <a:bodyPr wrap="square" lIns="27432" tIns="18288" rIns="27432" bIns="18288" anchor="t">
+            <a:spAutoFit/>
+          </a:bodyPr>
+          <a:lstStyle/>
+          <a:p>
+            <a:pPr algn="l">
+              <a:lnSpc>
+                <a:spcPct val="120000"/>
+              </a:lnSpc>
+            </a:pPr>
+            <a:r>
+              <a:rPr sz="1100" b="1" i="0">
+                <a:solidFill>
+                  <a:srgbClr val="C9A961"/>
+                </a:solidFill>
+                <a:latin typeface="Calibri"/>
+              </a:rPr>
+              <a:t>SUBMISSION §6  ·  PROOF OF EXECUTION</a:t>
+            </a:r>
+          </a:p>
+        </p:txBody>
+      </p:sp>
+      <p:sp>
+        <p:nvSpPr>
+          <p:cNvPr id="3" name="TextBox 2">
+            <a:extLst>
+              <a:ext uri="{FF2B5EF4-FFF2-40B4-BE49-F238E27FC236}">
+                <a16:creationId xmlns:a16="http://schemas.microsoft.com/office/drawing/2014/main" id="{23879742-5838-24BC-077E-886DED8BF0A5}"/>
+              </a:ext>
+            </a:extLst>
+          </p:cNvPr>
+          <p:cNvSpPr txBox="1"/>
+          <p:nvPr/>
+        </p:nvSpPr>
+        <p:spPr>
+          <a:xfrm>
+            <a:off x="548640" y="566928"/>
+            <a:ext cx="10972800" cy="541495"/>
+          </a:xfrm>
+          <a:prstGeom prst="rect">
+            <a:avLst/>
+          </a:prstGeom>
+          <a:noFill/>
+        </p:spPr>
+        <p:txBody>
+          <a:bodyPr wrap="square" lIns="27432" tIns="18288" rIns="27432" bIns="18288" anchor="t">
+            <a:spAutoFit/>
+          </a:bodyPr>
+          <a:lstStyle/>
+          <a:p>
+            <a:pPr algn="l">
+              <a:lnSpc>
+                <a:spcPct val="120000"/>
+              </a:lnSpc>
+            </a:pPr>
+            <a:r>
+              <a:rPr lang="en-US" sz="3000" b="1" i="0" dirty="0">
+                <a:solidFill>
+                  <a:srgbClr val="0B1437"/>
+                </a:solidFill>
+                <a:latin typeface="Georgia"/>
+              </a:rPr>
+              <a:t>Architecture: </a:t>
+            </a:r>
+            <a:r>
+              <a:rPr sz="3000" b="1" i="0" dirty="0">
+                <a:solidFill>
+                  <a:srgbClr val="0B1437"/>
+                </a:solidFill>
+                <a:latin typeface="Georgia"/>
+              </a:rPr>
+              <a:t>Live in n8n, public repo</a:t>
+            </a:r>
+          </a:p>
+        </p:txBody>
+      </p:sp>
+      <p:sp>
+        <p:nvSpPr>
+          <p:cNvPr id="4" name="Rectangle 3">
+            <a:extLst>
+              <a:ext uri="{FF2B5EF4-FFF2-40B4-BE49-F238E27FC236}">
+                <a16:creationId xmlns:a16="http://schemas.microsoft.com/office/drawing/2014/main" id="{13CD6370-5911-F404-19A7-A2FC2D14F62E}"/>
+              </a:ext>
+            </a:extLst>
+          </p:cNvPr>
+          <p:cNvSpPr/>
+          <p:nvPr/>
+        </p:nvSpPr>
+        <p:spPr>
+          <a:xfrm>
+            <a:off x="548640" y="1143000"/>
+            <a:ext cx="548640" cy="45720"/>
+          </a:xfrm>
+          <a:prstGeom prst="rect">
+            <a:avLst/>
+          </a:prstGeom>
+          <a:solidFill>
+            <a:srgbClr val="C9A961"/>
+          </a:solidFill>
+          <a:ln>
+            <a:noFill/>
+          </a:ln>
+          <a:effectLst/>
+        </p:spPr>
+        <p:style>
+          <a:lnRef idx="1">
+            <a:schemeClr val="accent1"/>
+          </a:lnRef>
+          <a:fillRef idx="3">
+            <a:schemeClr val="accent1"/>
+          </a:fillRef>
+          <a:effectRef idx="2">
+            <a:schemeClr val="accent1"/>
+          </a:effectRef>
+          <a:fontRef idx="minor">
+            <a:schemeClr val="lt1"/>
+          </a:fontRef>
+        </p:style>
+        <p:txBody>
+          <a:bodyPr rtlCol="0" anchor="ctr"/>
+          <a:lstStyle/>
+          <a:p>
+            <a:pPr algn="ctr"/>
+            <a:endParaRPr/>
+          </a:p>
+        </p:txBody>
+      </p:sp>
+      <p:sp>
+        <p:nvSpPr>
+          <p:cNvPr id="34" name="TextBox 33">
+            <a:extLst>
+              <a:ext uri="{FF2B5EF4-FFF2-40B4-BE49-F238E27FC236}">
+                <a16:creationId xmlns:a16="http://schemas.microsoft.com/office/drawing/2014/main" id="{2D20384F-136C-342E-416C-D77541DBAB9F}"/>
+              </a:ext>
+            </a:extLst>
+          </p:cNvPr>
+          <p:cNvSpPr txBox="1"/>
+          <p:nvPr/>
+        </p:nvSpPr>
+        <p:spPr>
+          <a:xfrm>
+            <a:off x="777240" y="6053328"/>
+            <a:ext cx="4937760" cy="365760"/>
+          </a:xfrm>
+          <a:prstGeom prst="rect">
+            <a:avLst/>
+          </a:prstGeom>
+          <a:noFill/>
+        </p:spPr>
+        <p:txBody>
+          <a:bodyPr wrap="square" lIns="27432" tIns="18288" rIns="27432" bIns="18288" anchor="t">
+            <a:spAutoFit/>
+          </a:bodyPr>
+          <a:lstStyle/>
+          <a:p>
+            <a:pPr algn="l">
+              <a:lnSpc>
+                <a:spcPct val="120000"/>
+              </a:lnSpc>
+            </a:pPr>
+            <a:r>
+              <a:rPr sz="1100" b="1" i="1" dirty="0">
+                <a:solidFill>
+                  <a:srgbClr val="2C8A5D"/>
+                </a:solidFill>
+                <a:latin typeface="Calibri"/>
+              </a:rPr>
+              <a:t>Validated live: Vikram Allen BPA ticket → </a:t>
+            </a:r>
+            <a:r>
+              <a:rPr sz="1100" b="1" i="1" dirty="0" err="1">
+                <a:solidFill>
+                  <a:srgbClr val="2C8A5D"/>
+                </a:solidFill>
+                <a:latin typeface="Calibri"/>
+              </a:rPr>
+              <a:t>health_conscious</a:t>
+            </a:r>
+            <a:r>
+              <a:rPr sz="1100" b="1" i="1" dirty="0">
+                <a:solidFill>
+                  <a:srgbClr val="2C8A5D"/>
+                </a:solidFill>
+                <a:latin typeface="Calibri"/>
+              </a:rPr>
+              <a:t> ✓</a:t>
+            </a:r>
+          </a:p>
+        </p:txBody>
+      </p:sp>
+      <p:sp>
+        <p:nvSpPr>
+          <p:cNvPr id="41" name="TextBox 40">
+            <a:extLst>
+              <a:ext uri="{FF2B5EF4-FFF2-40B4-BE49-F238E27FC236}">
+                <a16:creationId xmlns:a16="http://schemas.microsoft.com/office/drawing/2014/main" id="{25F301F6-37FC-35A5-C7BD-4031CE6640BA}"/>
+              </a:ext>
+            </a:extLst>
+          </p:cNvPr>
+          <p:cNvSpPr txBox="1"/>
+          <p:nvPr/>
+        </p:nvSpPr>
+        <p:spPr>
+          <a:xfrm>
+            <a:off x="5473701" y="6419088"/>
+            <a:ext cx="2543078" cy="226537"/>
+          </a:xfrm>
+          <a:prstGeom prst="rect">
+            <a:avLst/>
+          </a:prstGeom>
+          <a:noFill/>
+        </p:spPr>
+        <p:txBody>
+          <a:bodyPr wrap="square" lIns="27432" tIns="18288" rIns="27432" bIns="18288" anchor="t">
+            <a:spAutoFit/>
+          </a:bodyPr>
+          <a:lstStyle/>
+          <a:p>
+            <a:pPr algn="l">
+              <a:lnSpc>
+                <a:spcPct val="120000"/>
+              </a:lnSpc>
+            </a:pPr>
+            <a:r>
+              <a:rPr sz="1100" b="1" i="0" dirty="0">
+                <a:solidFill>
+                  <a:srgbClr val="FF0000"/>
+                </a:solidFill>
+                <a:latin typeface="Calibri"/>
+              </a:rPr>
+              <a:t>Public repo</a:t>
+            </a:r>
+            <a:r>
+              <a:rPr lang="en-US" sz="1100" b="1" i="0" dirty="0">
+                <a:solidFill>
+                  <a:srgbClr val="FF0000"/>
+                </a:solidFill>
+                <a:latin typeface="Calibri"/>
+              </a:rPr>
+              <a:t> Link:</a:t>
+            </a:r>
+            <a:endParaRPr sz="1100" b="1" i="0" dirty="0">
+              <a:solidFill>
+                <a:srgbClr val="FF0000"/>
+              </a:solidFill>
+              <a:latin typeface="Calibri"/>
+            </a:endParaRPr>
+          </a:p>
+        </p:txBody>
+      </p:sp>
+      <p:sp>
+        <p:nvSpPr>
+          <p:cNvPr id="42" name="TextBox 41">
+            <a:extLst>
+              <a:ext uri="{FF2B5EF4-FFF2-40B4-BE49-F238E27FC236}">
+                <a16:creationId xmlns:a16="http://schemas.microsoft.com/office/drawing/2014/main" id="{6A08C63E-2D53-6A25-323D-2D7465606294}"/>
+              </a:ext>
+            </a:extLst>
+          </p:cNvPr>
+          <p:cNvSpPr txBox="1"/>
+          <p:nvPr/>
+        </p:nvSpPr>
+        <p:spPr>
+          <a:xfrm>
+            <a:off x="6522722" y="6419088"/>
+            <a:ext cx="4196078" cy="208390"/>
+          </a:xfrm>
+          <a:prstGeom prst="rect">
+            <a:avLst/>
+          </a:prstGeom>
+          <a:noFill/>
+        </p:spPr>
+        <p:txBody>
+          <a:bodyPr wrap="square" lIns="27432" tIns="18288" rIns="27432" bIns="18288" anchor="t">
+            <a:spAutoFit/>
+          </a:bodyPr>
+          <a:lstStyle/>
+          <a:p>
+            <a:pPr algn="l">
+              <a:lnSpc>
+                <a:spcPct val="120000"/>
+              </a:lnSpc>
+            </a:pPr>
+            <a:r>
+              <a:rPr sz="1000" b="0" i="0" dirty="0" err="1">
+                <a:solidFill>
+                  <a:srgbClr val="FF0000"/>
+                </a:solidFill>
+                <a:latin typeface="Consolas"/>
+              </a:rPr>
+              <a:t>tejasdotchavan</a:t>
+            </a:r>
+            <a:r>
+              <a:rPr sz="1000" b="0" i="0" dirty="0">
+                <a:solidFill>
+                  <a:srgbClr val="FF0000"/>
+                </a:solidFill>
+                <a:latin typeface="Consolas"/>
+              </a:rPr>
+              <a:t>/e27-boldr-challenge-AlphaBeta</a:t>
+            </a:r>
+          </a:p>
+        </p:txBody>
+      </p:sp>
+      <p:sp>
+        <p:nvSpPr>
+          <p:cNvPr id="52" name="TextBox 51">
+            <a:extLst>
+              <a:ext uri="{FF2B5EF4-FFF2-40B4-BE49-F238E27FC236}">
+                <a16:creationId xmlns:a16="http://schemas.microsoft.com/office/drawing/2014/main" id="{557E7434-3575-06DC-5C73-D546C84262C1}"/>
+              </a:ext>
+            </a:extLst>
+          </p:cNvPr>
+          <p:cNvSpPr txBox="1"/>
+          <p:nvPr/>
+        </p:nvSpPr>
+        <p:spPr>
+          <a:xfrm>
+            <a:off x="548640" y="6537960"/>
+            <a:ext cx="5486400" cy="274320"/>
+          </a:xfrm>
+          <a:prstGeom prst="rect">
+            <a:avLst/>
+          </a:prstGeom>
+          <a:noFill/>
+        </p:spPr>
+        <p:txBody>
+          <a:bodyPr wrap="square" lIns="27432" tIns="18288" rIns="27432" bIns="18288" anchor="t">
+            <a:spAutoFit/>
+          </a:bodyPr>
+          <a:lstStyle/>
+          <a:p>
+            <a:pPr algn="l">
+              <a:lnSpc>
+                <a:spcPct val="120000"/>
+              </a:lnSpc>
+            </a:pPr>
+            <a:r>
+              <a:rPr sz="900" b="0" i="0">
+                <a:solidFill>
+                  <a:srgbClr val="6B7088"/>
+                </a:solidFill>
+                <a:latin typeface="Calibri"/>
+              </a:rPr>
+              <a:t>Team AlphaBeta  ·  Boldr Self-Improving Customer Intelligence Engine</a:t>
+            </a:r>
+          </a:p>
+        </p:txBody>
+      </p:sp>
+      <p:sp>
+        <p:nvSpPr>
+          <p:cNvPr id="53" name="TextBox 52">
+            <a:extLst>
+              <a:ext uri="{FF2B5EF4-FFF2-40B4-BE49-F238E27FC236}">
+                <a16:creationId xmlns:a16="http://schemas.microsoft.com/office/drawing/2014/main" id="{13CB16D7-3913-68CD-7D05-9130AEF974D6}"/>
+              </a:ext>
+            </a:extLst>
+          </p:cNvPr>
+          <p:cNvSpPr txBox="1"/>
+          <p:nvPr/>
+        </p:nvSpPr>
+        <p:spPr>
+          <a:xfrm>
+            <a:off x="10332720" y="6537960"/>
+            <a:ext cx="1371600" cy="274320"/>
+          </a:xfrm>
+          <a:prstGeom prst="rect">
+            <a:avLst/>
+          </a:prstGeom>
+          <a:noFill/>
+        </p:spPr>
+        <p:txBody>
+          <a:bodyPr wrap="square" lIns="27432" tIns="18288" rIns="27432" bIns="18288" anchor="t">
+            <a:spAutoFit/>
+          </a:bodyPr>
+          <a:lstStyle/>
+          <a:p>
+            <a:pPr algn="r">
+              <a:lnSpc>
+                <a:spcPct val="120000"/>
+              </a:lnSpc>
+            </a:pPr>
+            <a:r>
+              <a:rPr sz="900" b="0" i="0">
+                <a:solidFill>
+                  <a:srgbClr val="6B7088"/>
+                </a:solidFill>
+                <a:latin typeface="Calibri"/>
+              </a:rPr>
+              <a:t>11 / 14</a:t>
+            </a:r>
+          </a:p>
+        </p:txBody>
+      </p:sp>
+      <p:pic>
+        <p:nvPicPr>
+          <p:cNvPr id="27" name="Picture 26">
+            <a:extLst>
+              <a:ext uri="{FF2B5EF4-FFF2-40B4-BE49-F238E27FC236}">
+                <a16:creationId xmlns:a16="http://schemas.microsoft.com/office/drawing/2014/main" id="{494A1F78-6FAB-A11B-B2B5-042956648985}"/>
+              </a:ext>
+            </a:extLst>
+          </p:cNvPr>
+          <p:cNvPicPr>
+            <a:picLocks noChangeAspect="1"/>
+          </p:cNvPicPr>
+          <p:nvPr/>
+        </p:nvPicPr>
+        <p:blipFill>
+          <a:blip r:embed="rId2"/>
+          <a:srcRect l="54178" t="10338" r="-2766" b="50395"/>
+          <a:stretch>
+            <a:fillRect/>
+          </a:stretch>
+        </p:blipFill>
+        <p:spPr>
+          <a:xfrm>
+            <a:off x="3632200" y="2111740"/>
+            <a:ext cx="8779646" cy="3374660"/>
+          </a:xfrm>
+          <a:prstGeom prst="rect">
+            <a:avLst/>
+          </a:prstGeom>
+        </p:spPr>
+      </p:pic>
+      <p:sp>
+        <p:nvSpPr>
+          <p:cNvPr id="38" name="TextBox 37">
+            <a:extLst>
+              <a:ext uri="{FF2B5EF4-FFF2-40B4-BE49-F238E27FC236}">
+                <a16:creationId xmlns:a16="http://schemas.microsoft.com/office/drawing/2014/main" id="{241D80E3-78AC-15DD-86BB-397CEDD559A2}"/>
+              </a:ext>
+            </a:extLst>
+          </p:cNvPr>
+          <p:cNvSpPr txBox="1"/>
+          <p:nvPr/>
+        </p:nvSpPr>
+        <p:spPr>
+          <a:xfrm>
+            <a:off x="1805940" y="3088471"/>
+            <a:ext cx="1826260" cy="600164"/>
+          </a:xfrm>
+          <a:prstGeom prst="rect">
+            <a:avLst/>
+          </a:prstGeom>
+          <a:noFill/>
+        </p:spPr>
+        <p:txBody>
+          <a:bodyPr wrap="square" rtlCol="0">
+            <a:spAutoFit/>
+          </a:bodyPr>
+          <a:lstStyle/>
+          <a:p>
+            <a:pPr algn="ctr"/>
+            <a:r>
+              <a:rPr lang="en-US" sz="1100" dirty="0">
+                <a:solidFill>
+                  <a:srgbClr val="FF0000"/>
+                </a:solidFill>
+              </a:rPr>
+              <a:t>CS gets a message to approve or decline AI generated draft response</a:t>
+            </a:r>
+          </a:p>
+        </p:txBody>
+      </p:sp>
+      <p:sp>
+        <p:nvSpPr>
+          <p:cNvPr id="39" name="TextBox 38">
+            <a:extLst>
+              <a:ext uri="{FF2B5EF4-FFF2-40B4-BE49-F238E27FC236}">
+                <a16:creationId xmlns:a16="http://schemas.microsoft.com/office/drawing/2014/main" id="{2C5EA79F-796D-323D-75D6-A2E8E783436E}"/>
+              </a:ext>
+            </a:extLst>
+          </p:cNvPr>
+          <p:cNvSpPr txBox="1"/>
+          <p:nvPr/>
+        </p:nvSpPr>
+        <p:spPr>
+          <a:xfrm>
+            <a:off x="6474462" y="1861792"/>
+            <a:ext cx="1285240" cy="430887"/>
+          </a:xfrm>
+          <a:prstGeom prst="rect">
+            <a:avLst/>
+          </a:prstGeom>
+          <a:noFill/>
+        </p:spPr>
+        <p:txBody>
+          <a:bodyPr wrap="square" rtlCol="0">
+            <a:spAutoFit/>
+          </a:bodyPr>
+          <a:lstStyle/>
+          <a:p>
+            <a:pPr algn="ctr"/>
+            <a:r>
+              <a:rPr lang="en-US" sz="1100" dirty="0">
+                <a:solidFill>
+                  <a:srgbClr val="FF0000"/>
+                </a:solidFill>
+              </a:rPr>
+              <a:t>Customer receives reply</a:t>
+            </a:r>
+          </a:p>
+        </p:txBody>
+      </p:sp>
+      <p:sp>
+        <p:nvSpPr>
+          <p:cNvPr id="44" name="TextBox 43">
+            <a:extLst>
+              <a:ext uri="{FF2B5EF4-FFF2-40B4-BE49-F238E27FC236}">
+                <a16:creationId xmlns:a16="http://schemas.microsoft.com/office/drawing/2014/main" id="{DD54025E-4D4B-A20E-958D-01C7DD82226F}"/>
+              </a:ext>
+            </a:extLst>
+          </p:cNvPr>
+          <p:cNvSpPr txBox="1"/>
+          <p:nvPr/>
+        </p:nvSpPr>
+        <p:spPr>
+          <a:xfrm>
+            <a:off x="5329556" y="1395700"/>
+            <a:ext cx="6582410" cy="2123658"/>
+          </a:xfrm>
+          <a:prstGeom prst="rect">
+            <a:avLst/>
+          </a:prstGeom>
+          <a:noFill/>
+          <a:ln>
+            <a:solidFill>
+              <a:srgbClr val="00B050"/>
+            </a:solidFill>
+            <a:prstDash val="dash"/>
+          </a:ln>
+        </p:spPr>
+        <p:txBody>
+          <a:bodyPr wrap="square" rtlCol="0">
+            <a:spAutoFit/>
+          </a:bodyPr>
+          <a:lstStyle/>
+          <a:p>
+            <a:pPr algn="ctr"/>
+            <a:r>
+              <a:rPr lang="en-US" sz="1100" dirty="0">
+                <a:solidFill>
+                  <a:srgbClr val="FF0000"/>
+                </a:solidFill>
+              </a:rPr>
+              <a:t>IF CS approves sending of response</a:t>
+            </a:r>
+          </a:p>
+          <a:p>
+            <a:pPr algn="ctr"/>
+            <a:endParaRPr lang="en-US" sz="1100" dirty="0">
+              <a:solidFill>
+                <a:srgbClr val="FF0000"/>
+              </a:solidFill>
+            </a:endParaRPr>
+          </a:p>
+          <a:p>
+            <a:pPr algn="ctr"/>
+            <a:endParaRPr lang="en-US" sz="1100" dirty="0">
+              <a:solidFill>
+                <a:srgbClr val="FF0000"/>
+              </a:solidFill>
+            </a:endParaRPr>
+          </a:p>
+          <a:p>
+            <a:pPr algn="ctr"/>
+            <a:endParaRPr lang="en-US" sz="1100" dirty="0">
+              <a:solidFill>
+                <a:srgbClr val="FF0000"/>
+              </a:solidFill>
+            </a:endParaRPr>
+          </a:p>
+          <a:p>
+            <a:pPr algn="ctr"/>
+            <a:endParaRPr lang="en-US" sz="1100" dirty="0">
+              <a:solidFill>
+                <a:srgbClr val="FF0000"/>
+              </a:solidFill>
+            </a:endParaRPr>
+          </a:p>
+          <a:p>
+            <a:pPr algn="ctr"/>
+            <a:endParaRPr lang="en-US" sz="1100" dirty="0">
+              <a:solidFill>
+                <a:srgbClr val="FF0000"/>
+              </a:solidFill>
+            </a:endParaRPr>
+          </a:p>
+          <a:p>
+            <a:pPr algn="ctr"/>
+            <a:endParaRPr lang="en-US" sz="1100" dirty="0">
+              <a:solidFill>
+                <a:srgbClr val="FF0000"/>
+              </a:solidFill>
+            </a:endParaRPr>
+          </a:p>
+          <a:p>
+            <a:pPr algn="ctr"/>
+            <a:endParaRPr lang="en-US" sz="1100" dirty="0">
+              <a:solidFill>
+                <a:srgbClr val="FF0000"/>
+              </a:solidFill>
+            </a:endParaRPr>
+          </a:p>
+          <a:p>
+            <a:pPr algn="ctr"/>
+            <a:endParaRPr lang="en-US" sz="1100" dirty="0">
+              <a:solidFill>
+                <a:srgbClr val="FF0000"/>
+              </a:solidFill>
+            </a:endParaRPr>
+          </a:p>
+          <a:p>
+            <a:pPr algn="ctr"/>
+            <a:endParaRPr lang="en-US" sz="1100" dirty="0">
+              <a:solidFill>
+                <a:srgbClr val="FF0000"/>
+              </a:solidFill>
+            </a:endParaRPr>
+          </a:p>
+          <a:p>
+            <a:pPr algn="ctr"/>
+            <a:endParaRPr lang="en-US" sz="1100" dirty="0">
+              <a:solidFill>
+                <a:srgbClr val="FF0000"/>
+              </a:solidFill>
+            </a:endParaRPr>
+          </a:p>
+          <a:p>
+            <a:pPr algn="ctr"/>
+            <a:endParaRPr lang="en-US" sz="1100" dirty="0">
+              <a:solidFill>
+                <a:srgbClr val="FF0000"/>
+              </a:solidFill>
+            </a:endParaRPr>
+          </a:p>
+        </p:txBody>
+      </p:sp>
+      <p:sp>
+        <p:nvSpPr>
+          <p:cNvPr id="45" name="TextBox 44">
+            <a:extLst>
+              <a:ext uri="{FF2B5EF4-FFF2-40B4-BE49-F238E27FC236}">
+                <a16:creationId xmlns:a16="http://schemas.microsoft.com/office/drawing/2014/main" id="{43D02D7A-72D6-703C-CCB5-FCF983954922}"/>
+              </a:ext>
+            </a:extLst>
+          </p:cNvPr>
+          <p:cNvSpPr txBox="1"/>
+          <p:nvPr/>
+        </p:nvSpPr>
+        <p:spPr>
+          <a:xfrm>
+            <a:off x="5329556" y="3586996"/>
+            <a:ext cx="6582410" cy="1785104"/>
+          </a:xfrm>
+          <a:prstGeom prst="rect">
+            <a:avLst/>
+          </a:prstGeom>
+          <a:noFill/>
+          <a:ln>
+            <a:solidFill>
+              <a:srgbClr val="00B050"/>
+            </a:solidFill>
+            <a:prstDash val="dash"/>
+          </a:ln>
+        </p:spPr>
+        <p:txBody>
+          <a:bodyPr wrap="square" rtlCol="0">
+            <a:spAutoFit/>
+          </a:bodyPr>
+          <a:lstStyle/>
+          <a:p>
+            <a:pPr algn="ctr"/>
+            <a:r>
+              <a:rPr lang="en-US" sz="1100" dirty="0">
+                <a:solidFill>
+                  <a:srgbClr val="FF0000"/>
+                </a:solidFill>
+              </a:rPr>
+              <a:t>IF CS rejects, add the response to </a:t>
+            </a:r>
+            <a:r>
+              <a:rPr lang="en-US" sz="1100" dirty="0" err="1">
+                <a:solidFill>
+                  <a:srgbClr val="FF0000"/>
+                </a:solidFill>
+              </a:rPr>
+              <a:t>Gsheet</a:t>
+            </a:r>
+            <a:r>
+              <a:rPr lang="en-US" sz="1100" dirty="0">
+                <a:solidFill>
+                  <a:srgbClr val="FF0000"/>
+                </a:solidFill>
+              </a:rPr>
+              <a:t> for escalation review and notify CS of rejected response</a:t>
+            </a:r>
+          </a:p>
+          <a:p>
+            <a:pPr algn="ctr"/>
+            <a:endParaRPr lang="en-US" sz="1100" dirty="0">
+              <a:solidFill>
+                <a:srgbClr val="FF0000"/>
+              </a:solidFill>
+            </a:endParaRPr>
+          </a:p>
+          <a:p>
+            <a:pPr algn="ctr"/>
+            <a:endParaRPr lang="en-US" sz="1100" dirty="0">
+              <a:solidFill>
+                <a:srgbClr val="FF0000"/>
+              </a:solidFill>
+            </a:endParaRPr>
+          </a:p>
+          <a:p>
+            <a:pPr algn="ctr"/>
+            <a:endParaRPr lang="en-US" sz="1100" dirty="0">
+              <a:solidFill>
+                <a:srgbClr val="FF0000"/>
+              </a:solidFill>
+            </a:endParaRPr>
+          </a:p>
+          <a:p>
+            <a:pPr algn="ctr"/>
+            <a:endParaRPr lang="en-US" sz="1100" dirty="0">
+              <a:solidFill>
+                <a:srgbClr val="FF0000"/>
+              </a:solidFill>
+            </a:endParaRPr>
+          </a:p>
+          <a:p>
+            <a:pPr algn="ctr"/>
+            <a:endParaRPr lang="en-US" sz="1100" dirty="0">
+              <a:solidFill>
+                <a:srgbClr val="FF0000"/>
+              </a:solidFill>
+            </a:endParaRPr>
+          </a:p>
+          <a:p>
+            <a:pPr algn="ctr"/>
+            <a:endParaRPr lang="en-US" sz="1100" dirty="0">
+              <a:solidFill>
+                <a:srgbClr val="FF0000"/>
+              </a:solidFill>
+            </a:endParaRPr>
+          </a:p>
+          <a:p>
+            <a:pPr algn="ctr"/>
+            <a:endParaRPr lang="en-US" sz="1100" dirty="0">
+              <a:solidFill>
+                <a:srgbClr val="FF0000"/>
+              </a:solidFill>
+            </a:endParaRPr>
+          </a:p>
+          <a:p>
+            <a:pPr algn="ctr"/>
+            <a:endParaRPr lang="en-US" sz="1100" dirty="0">
+              <a:solidFill>
+                <a:srgbClr val="FF0000"/>
+              </a:solidFill>
+            </a:endParaRPr>
+          </a:p>
+          <a:p>
+            <a:pPr algn="ctr"/>
+            <a:endParaRPr lang="en-US" sz="1100" dirty="0">
+              <a:solidFill>
+                <a:srgbClr val="FF0000"/>
+              </a:solidFill>
+            </a:endParaRPr>
+          </a:p>
+        </p:txBody>
+      </p:sp>
+      <p:sp>
+        <p:nvSpPr>
+          <p:cNvPr id="5" name="TextBox 4">
+            <a:extLst>
+              <a:ext uri="{FF2B5EF4-FFF2-40B4-BE49-F238E27FC236}">
+                <a16:creationId xmlns:a16="http://schemas.microsoft.com/office/drawing/2014/main" id="{43E814A6-239A-7CDB-C3D7-ABA54974418F}"/>
+              </a:ext>
+            </a:extLst>
+          </p:cNvPr>
+          <p:cNvSpPr txBox="1"/>
+          <p:nvPr/>
+        </p:nvSpPr>
+        <p:spPr>
+          <a:xfrm>
+            <a:off x="8100062" y="1861792"/>
+            <a:ext cx="1285240" cy="261610"/>
+          </a:xfrm>
+          <a:prstGeom prst="rect">
+            <a:avLst/>
+          </a:prstGeom>
+          <a:noFill/>
+        </p:spPr>
+        <p:txBody>
+          <a:bodyPr wrap="square" rtlCol="0">
+            <a:spAutoFit/>
+          </a:bodyPr>
+          <a:lstStyle/>
+          <a:p>
+            <a:pPr algn="ctr"/>
+            <a:r>
+              <a:rPr lang="en-US" sz="1100" dirty="0">
+                <a:solidFill>
+                  <a:srgbClr val="FF0000"/>
+                </a:solidFill>
+              </a:rPr>
+              <a:t>Reply logged</a:t>
+            </a:r>
+          </a:p>
+        </p:txBody>
+      </p:sp>
+      <p:sp>
+        <p:nvSpPr>
+          <p:cNvPr id="6" name="TextBox 5">
+            <a:extLst>
+              <a:ext uri="{FF2B5EF4-FFF2-40B4-BE49-F238E27FC236}">
+                <a16:creationId xmlns:a16="http://schemas.microsoft.com/office/drawing/2014/main" id="{E77B92FB-CAE5-0579-5B95-C565A664EE59}"/>
+              </a:ext>
+            </a:extLst>
+          </p:cNvPr>
+          <p:cNvSpPr txBox="1"/>
+          <p:nvPr/>
+        </p:nvSpPr>
+        <p:spPr>
+          <a:xfrm>
+            <a:off x="9560562" y="1861792"/>
+            <a:ext cx="1285240" cy="430887"/>
+          </a:xfrm>
+          <a:prstGeom prst="rect">
+            <a:avLst/>
+          </a:prstGeom>
+          <a:noFill/>
+        </p:spPr>
+        <p:txBody>
+          <a:bodyPr wrap="square" rtlCol="0">
+            <a:spAutoFit/>
+          </a:bodyPr>
+          <a:lstStyle/>
+          <a:p>
+            <a:pPr algn="ctr"/>
+            <a:r>
+              <a:rPr lang="en-US" sz="1100" dirty="0">
+                <a:solidFill>
+                  <a:srgbClr val="FF0000"/>
+                </a:solidFill>
+              </a:rPr>
+              <a:t>CS alerted of response sent</a:t>
+            </a:r>
+          </a:p>
+        </p:txBody>
+      </p:sp>
+    </p:spTree>
+    <p:extLst>
+      <p:ext uri="{BB962C8B-B14F-4D97-AF65-F5344CB8AC3E}">
+        <p14:creationId xmlns:p14="http://schemas.microsoft.com/office/powerpoint/2010/main" val="1638635510"/>
+      </p:ext>
+    </p:extLst>
+  </p:cSld>
+  <p:clrMapOvr>
+    <a:masterClrMapping/>
+  </p:clrMapOvr>
+</p:sld>
+</file>
+
+<file path=ppt/slides/slide13.xml><?xml version="1.0" encoding="utf-8"?>
 <p:sld xmlns:a="http://schemas.openxmlformats.org/drawingml/2006/main" xmlns:r="http://schemas.openxmlformats.org/officeDocument/2006/relationships" xmlns:p="http://schemas.openxmlformats.org/presentationml/2006/main">
   <p:cSld>
     <p:spTree>
@@ -8397,7 +8014,7 @@
 </p:sld>
 </file>
 
-<file path=ppt/slides/slide13.xml><?xml version="1.0" encoding="utf-8"?>
+<file path=ppt/slides/slide14.xml><?xml version="1.0" encoding="utf-8"?>
 <p:sld xmlns:a="http://schemas.openxmlformats.org/drawingml/2006/main" xmlns:r="http://schemas.openxmlformats.org/officeDocument/2006/relationships" xmlns:p="http://schemas.openxmlformats.org/presentationml/2006/main">
   <p:cSld>
     <p:bg>
